--- a/9 - NSparkAvancé - Images.pptx
+++ b/9 - NSparkAvancé - Images.pptx
@@ -27,17 +27,17 @@
     <p:sldId id="2134807236" r:id="rId21"/>
     <p:sldId id="2134807238" r:id="rId22"/>
     <p:sldId id="2134807237" r:id="rId23"/>
-    <p:sldId id="2134807239" r:id="rId24"/>
-    <p:sldId id="2134807240" r:id="rId25"/>
-    <p:sldId id="2134807241" r:id="rId26"/>
-    <p:sldId id="2134807242" r:id="rId27"/>
-    <p:sldId id="2134807243" r:id="rId28"/>
-    <p:sldId id="2134807244" r:id="rId29"/>
-    <p:sldId id="2134807245" r:id="rId30"/>
-    <p:sldId id="2134807246" r:id="rId31"/>
-    <p:sldId id="2134807247" r:id="rId32"/>
-    <p:sldId id="2134807248" r:id="rId33"/>
-    <p:sldId id="2134807249" r:id="rId34"/>
+    <p:sldId id="2134807240" r:id="rId24"/>
+    <p:sldId id="2134807241" r:id="rId25"/>
+    <p:sldId id="2134807242" r:id="rId26"/>
+    <p:sldId id="2134807243" r:id="rId27"/>
+    <p:sldId id="2134807244" r:id="rId28"/>
+    <p:sldId id="2134807245" r:id="rId29"/>
+    <p:sldId id="2134807246" r:id="rId30"/>
+    <p:sldId id="2134807247" r:id="rId31"/>
+    <p:sldId id="2134807248" r:id="rId32"/>
+    <p:sldId id="2134807249" r:id="rId33"/>
+    <p:sldId id="2134807254" r:id="rId34"/>
     <p:sldId id="2134807250" r:id="rId35"/>
     <p:sldId id="2134807251" r:id="rId36"/>
     <p:sldId id="2134807252" r:id="rId37"/>
@@ -633,7 +633,7 @@
           <a:p>
             <a:fld id="{6DEFCF4C-C656-4173-9B19-E1AF5C686E36}" type="datetimeFigureOut">
               <a:rPr lang="fr-FR" smtClean="0"/>
-              <a:t>12/12/2025</a:t>
+              <a:t>29/09/2026</a:t>
             </a:fld>
             <a:endParaRPr lang="fr-FR"/>
           </a:p>
@@ -1207,7 +1207,7 @@
           <a:p>
             <a:fld id="{1D8BD707-D9CF-40AE-B4C6-C98DA3205C09}" type="datetimeFigureOut">
               <a:rPr lang="en-US"/>
-              <a:t>12/12/2025</a:t>
+              <a:t>9/29/2026</a:t>
             </a:fld>
             <a:endParaRPr lang="en-US"/>
           </a:p>
@@ -1399,7 +1399,7 @@
           <a:p>
             <a:fld id="{1D8BD707-D9CF-40AE-B4C6-C98DA3205C09}" type="datetimeFigureOut">
               <a:rPr lang="en-US"/>
-              <a:t>12/12/2025</a:t>
+              <a:t>9/29/2026</a:t>
             </a:fld>
             <a:endParaRPr lang="en-US"/>
           </a:p>
@@ -1630,7 +1630,7 @@
           <a:p>
             <a:fld id="{1D8BD707-D9CF-40AE-B4C6-C98DA3205C09}" type="datetimeFigureOut">
               <a:rPr lang="en-US"/>
-              <a:t>12/12/2025</a:t>
+              <a:t>9/29/2026</a:t>
             </a:fld>
             <a:endParaRPr lang="en-US"/>
           </a:p>
@@ -1832,7 +1832,7 @@
           <a:p>
             <a:fld id="{1D8BD707-D9CF-40AE-B4C6-C98DA3205C09}" type="datetimeFigureOut">
               <a:rPr lang="en-US"/>
-              <a:t>12/12/2025</a:t>
+              <a:t>9/29/2026</a:t>
             </a:fld>
             <a:endParaRPr lang="en-US"/>
           </a:p>
@@ -1968,7 +1968,7 @@
           <a:p>
             <a:fld id="{1D8BD707-D9CF-40AE-B4C6-C98DA3205C09}" type="datetimeFigureOut">
               <a:rPr lang="en-US"/>
-              <a:t>12/12/2025</a:t>
+              <a:t>9/29/2026</a:t>
             </a:fld>
             <a:endParaRPr lang="en-US"/>
           </a:p>
@@ -2070,7 +2070,7 @@
           <a:p>
             <a:fld id="{FE69C2FC-FDFD-4827-B361-612217FFD460}" type="datetimeFigureOut">
               <a:rPr lang="fr-FR" smtClean="0"/>
-              <a:t>12/12/2025</a:t>
+              <a:t>29/09/2026</a:t>
             </a:fld>
             <a:endParaRPr lang="fr-FR"/>
           </a:p>
@@ -2582,7 +2582,7 @@
           <a:p>
             <a:fld id="{1D8BD707-D9CF-40AE-B4C6-C98DA3205C09}" type="datetimeFigureOut">
               <a:rPr lang="en-US"/>
-              <a:t>12/12/2025</a:t>
+              <a:t>9/29/2026</a:t>
             </a:fld>
             <a:endParaRPr lang="en-US"/>
           </a:p>
@@ -12225,8 +12225,8 @@
           </a:fontRef>
         </p:style>
       </p:cxnSp>
-      <mc:AlternateContent xmlns:mc="http://schemas.openxmlformats.org/markup-compatibility/2006">
-        <mc:Choice xmlns:p14="http://schemas.microsoft.com/office/powerpoint/2010/main" Requires="p14">
+      <mc:AlternateContent xmlns:mc="http://schemas.openxmlformats.org/markup-compatibility/2006" xmlns:p14="http://schemas.microsoft.com/office/powerpoint/2010/main">
+        <mc:Choice Requires="p14">
           <p:contentPart p14:bwMode="auto" r:id="rId2">
             <p14:nvContentPartPr>
               <p14:cNvPr id="5" name="Encre 4">
@@ -12245,7 +12245,7 @@
             </p14:xfrm>
           </p:contentPart>
         </mc:Choice>
-        <mc:Fallback>
+        <mc:Fallback xmlns="">
           <p:pic>
             <p:nvPicPr>
               <p:cNvPr id="5" name="Encre 4">
@@ -16942,968 +16942,6 @@
         <p:cNvPr id="1" name="">
           <a:extLst>
             <a:ext uri="{FF2B5EF4-FFF2-40B4-BE49-F238E27FC236}">
-              <a16:creationId xmlns:a16="http://schemas.microsoft.com/office/drawing/2014/main" id="{1460A3E5-01EE-34B5-9303-6A353AC6F2D7}"/>
-            </a:ext>
-          </a:extLst>
-        </p:cNvPr>
-        <p:cNvGrpSpPr/>
-        <p:nvPr/>
-      </p:nvGrpSpPr>
-      <p:grpSpPr>
-        <a:xfrm>
-          <a:off x="0" y="0"/>
-          <a:ext cx="0" cy="0"/>
-          <a:chOff x="0" y="0"/>
-          <a:chExt cx="0" cy="0"/>
-        </a:xfrm>
-      </p:grpSpPr>
-      <p:sp>
-        <p:nvSpPr>
-          <p:cNvPr id="40" name="ZoneTexte 39">
-            <a:extLst>
-              <a:ext uri="{FF2B5EF4-FFF2-40B4-BE49-F238E27FC236}">
-                <a16:creationId xmlns:a16="http://schemas.microsoft.com/office/drawing/2014/main" id="{38987297-A261-E9B5-9E00-DBA0BC33DD62}"/>
-              </a:ext>
-            </a:extLst>
-          </p:cNvPr>
-          <p:cNvSpPr txBox="1"/>
-          <p:nvPr/>
-        </p:nvSpPr>
-        <p:spPr>
-          <a:xfrm>
-            <a:off x="365918" y="1041315"/>
-            <a:ext cx="8146180" cy="3436838"/>
-          </a:xfrm>
-          <a:prstGeom prst="rect">
-            <a:avLst/>
-          </a:prstGeom>
-          <a:noFill/>
-        </p:spPr>
-        <p:txBody>
-          <a:bodyPr wrap="square" rtlCol="0">
-            <a:spAutoFit/>
-          </a:bodyPr>
-          <a:lstStyle/>
-          <a:p>
-            <a:pPr algn="just">
-              <a:spcBef>
-                <a:spcPts val="400"/>
-              </a:spcBef>
-              <a:spcAft>
-                <a:spcPts val="400"/>
-              </a:spcAft>
-            </a:pPr>
-            <a:r>
-              <a:rPr lang="fr-FR" sz="1200" dirty="0">
-                <a:ea typeface="Calibri" panose="020F0502020204030204" pitchFamily="34" charset="0"/>
-                <a:cs typeface="Arial" panose="020B0604020202020204" pitchFamily="34" charset="0"/>
-              </a:rPr>
-              <a:t>Etapes</a:t>
-            </a:r>
-          </a:p>
-          <a:p>
-            <a:pPr>
-              <a:spcBef>
-                <a:spcPts val="400"/>
-              </a:spcBef>
-              <a:spcAft>
-                <a:spcPts val="400"/>
-              </a:spcAft>
-            </a:pPr>
-            <a:r>
-              <a:rPr lang="fr-FR" sz="1200" dirty="0">
-                <a:ea typeface="Calibri" panose="020F0502020204030204" pitchFamily="34" charset="0"/>
-                <a:cs typeface="Arial" panose="020B0604020202020204" pitchFamily="34" charset="0"/>
-              </a:rPr>
-              <a:t>Sauvegarder le modèle:</a:t>
-            </a:r>
-          </a:p>
-          <a:p>
-            <a:pPr>
-              <a:spcBef>
-                <a:spcPts val="400"/>
-              </a:spcBef>
-              <a:spcAft>
-                <a:spcPts val="400"/>
-              </a:spcAft>
-            </a:pPr>
-            <a:endParaRPr lang="fr-FR" sz="1200" dirty="0">
-              <a:ea typeface="Calibri" panose="020F0502020204030204" pitchFamily="34" charset="0"/>
-              <a:cs typeface="Arial" panose="020B0604020202020204" pitchFamily="34" charset="0"/>
-            </a:endParaRPr>
-          </a:p>
-          <a:p>
-            <a:pPr>
-              <a:spcBef>
-                <a:spcPts val="400"/>
-              </a:spcBef>
-              <a:spcAft>
-                <a:spcPts val="400"/>
-              </a:spcAft>
-            </a:pPr>
-            <a:r>
-              <a:rPr lang="fr-FR" sz="1200" dirty="0">
-                <a:ea typeface="Calibri" panose="020F0502020204030204" pitchFamily="34" charset="0"/>
-                <a:cs typeface="Arial" panose="020B0604020202020204" pitchFamily="34" charset="0"/>
-              </a:rPr>
-              <a:t>Résultat:</a:t>
-            </a:r>
-          </a:p>
-          <a:p>
-            <a:pPr>
-              <a:spcBef>
-                <a:spcPts val="400"/>
-              </a:spcBef>
-              <a:spcAft>
-                <a:spcPts val="400"/>
-              </a:spcAft>
-            </a:pPr>
-            <a:endParaRPr lang="fr-FR" sz="1200" dirty="0">
-              <a:ea typeface="Calibri" panose="020F0502020204030204" pitchFamily="34" charset="0"/>
-              <a:cs typeface="Arial" panose="020B0604020202020204" pitchFamily="34" charset="0"/>
-            </a:endParaRPr>
-          </a:p>
-          <a:p>
-            <a:pPr>
-              <a:spcBef>
-                <a:spcPts val="400"/>
-              </a:spcBef>
-              <a:spcAft>
-                <a:spcPts val="400"/>
-              </a:spcAft>
-            </a:pPr>
-            <a:endParaRPr lang="fr-FR" sz="1200" dirty="0">
-              <a:ea typeface="Calibri" panose="020F0502020204030204" pitchFamily="34" charset="0"/>
-              <a:cs typeface="Arial" panose="020B0604020202020204" pitchFamily="34" charset="0"/>
-            </a:endParaRPr>
-          </a:p>
-          <a:p>
-            <a:pPr>
-              <a:spcBef>
-                <a:spcPts val="400"/>
-              </a:spcBef>
-              <a:spcAft>
-                <a:spcPts val="400"/>
-              </a:spcAft>
-            </a:pPr>
-            <a:endParaRPr lang="fr-FR" sz="1200" dirty="0">
-              <a:ea typeface="Calibri" panose="020F0502020204030204" pitchFamily="34" charset="0"/>
-              <a:cs typeface="Arial" panose="020B0604020202020204" pitchFamily="34" charset="0"/>
-            </a:endParaRPr>
-          </a:p>
-          <a:p>
-            <a:pPr>
-              <a:spcBef>
-                <a:spcPts val="400"/>
-              </a:spcBef>
-              <a:spcAft>
-                <a:spcPts val="400"/>
-              </a:spcAft>
-            </a:pPr>
-            <a:endParaRPr lang="fr-FR" sz="1200" dirty="0">
-              <a:ea typeface="Calibri" panose="020F0502020204030204" pitchFamily="34" charset="0"/>
-              <a:cs typeface="Arial" panose="020B0604020202020204" pitchFamily="34" charset="0"/>
-            </a:endParaRPr>
-          </a:p>
-          <a:p>
-            <a:pPr>
-              <a:spcBef>
-                <a:spcPts val="400"/>
-              </a:spcBef>
-              <a:spcAft>
-                <a:spcPts val="400"/>
-              </a:spcAft>
-            </a:pPr>
-            <a:endParaRPr lang="fr-FR" sz="1200" dirty="0">
-              <a:ea typeface="Calibri" panose="020F0502020204030204" pitchFamily="34" charset="0"/>
-              <a:cs typeface="Arial" panose="020B0604020202020204" pitchFamily="34" charset="0"/>
-            </a:endParaRPr>
-          </a:p>
-          <a:p>
-            <a:pPr>
-              <a:spcBef>
-                <a:spcPts val="400"/>
-              </a:spcBef>
-              <a:spcAft>
-                <a:spcPts val="400"/>
-              </a:spcAft>
-            </a:pPr>
-            <a:endParaRPr lang="fr-FR" sz="1200" dirty="0">
-              <a:ea typeface="Calibri" panose="020F0502020204030204" pitchFamily="34" charset="0"/>
-              <a:cs typeface="Arial" panose="020B0604020202020204" pitchFamily="34" charset="0"/>
-            </a:endParaRPr>
-          </a:p>
-          <a:p>
-            <a:pPr>
-              <a:spcBef>
-                <a:spcPts val="400"/>
-              </a:spcBef>
-              <a:spcAft>
-                <a:spcPts val="400"/>
-              </a:spcAft>
-            </a:pPr>
-            <a:endParaRPr lang="fr-FR" sz="1200" dirty="0">
-              <a:ea typeface="Calibri" panose="020F0502020204030204" pitchFamily="34" charset="0"/>
-              <a:cs typeface="Arial" panose="020B0604020202020204" pitchFamily="34" charset="0"/>
-            </a:endParaRPr>
-          </a:p>
-          <a:p>
-            <a:pPr>
-              <a:spcBef>
-                <a:spcPts val="400"/>
-              </a:spcBef>
-              <a:spcAft>
-                <a:spcPts val="400"/>
-              </a:spcAft>
-            </a:pPr>
-            <a:r>
-              <a:rPr lang="fr-FR" sz="1200" dirty="0">
-                <a:ea typeface="Calibri" panose="020F0502020204030204" pitchFamily="34" charset="0"/>
-                <a:cs typeface="Arial" panose="020B0604020202020204" pitchFamily="34" charset="0"/>
-              </a:rPr>
-              <a:t>Pour le relire: </a:t>
-            </a:r>
-          </a:p>
-        </p:txBody>
-      </p:sp>
-      <p:sp>
-        <p:nvSpPr>
-          <p:cNvPr id="46" name="Google Shape;230;p17">
-            <a:extLst>
-              <a:ext uri="{FF2B5EF4-FFF2-40B4-BE49-F238E27FC236}">
-                <a16:creationId xmlns:a16="http://schemas.microsoft.com/office/drawing/2014/main" id="{71D46366-AF96-F501-391B-E6C3AA7D97B6}"/>
-              </a:ext>
-            </a:extLst>
-          </p:cNvPr>
-          <p:cNvSpPr/>
-          <p:nvPr/>
-        </p:nvSpPr>
-        <p:spPr>
-          <a:xfrm>
-            <a:off x="728524" y="58794"/>
-            <a:ext cx="7865349" cy="952920"/>
-          </a:xfrm>
-          <a:custGeom>
-            <a:avLst/>
-            <a:gdLst/>
-            <a:ahLst/>
-            <a:cxnLst/>
-            <a:rect l="l" t="t" r="r" b="b"/>
-            <a:pathLst>
-              <a:path w="12451" h="8780" extrusionOk="0">
-                <a:moveTo>
-                  <a:pt x="0" y="0"/>
-                </a:moveTo>
-                <a:lnTo>
-                  <a:pt x="0" y="8780"/>
-                </a:lnTo>
-                <a:lnTo>
-                  <a:pt x="12101" y="8780"/>
-                </a:lnTo>
-                <a:cubicBezTo>
-                  <a:pt x="12289" y="8780"/>
-                  <a:pt x="12451" y="8618"/>
-                  <a:pt x="12451" y="8428"/>
-                </a:cubicBezTo>
-                <a:lnTo>
-                  <a:pt x="12451" y="378"/>
-                </a:lnTo>
-                <a:cubicBezTo>
-                  <a:pt x="12451" y="162"/>
-                  <a:pt x="12289" y="0"/>
-                  <a:pt x="12101" y="0"/>
-                </a:cubicBezTo>
-                <a:close/>
-              </a:path>
-            </a:pathLst>
-          </a:custGeom>
-          <a:solidFill>
-            <a:srgbClr val="E89D06"/>
-          </a:solidFill>
-          <a:ln>
-            <a:noFill/>
-          </a:ln>
-          <a:effectLst>
-            <a:outerShdw blurRad="85725" dist="57150" dir="1200000" algn="bl" rotWithShape="0">
-              <a:srgbClr val="000000">
-                <a:alpha val="20000"/>
-              </a:srgbClr>
-            </a:outerShdw>
-          </a:effectLst>
-        </p:spPr>
-        <p:txBody>
-          <a:bodyPr spcFirstLastPara="1" wrap="square" lIns="91425" tIns="91425" rIns="91425" bIns="91425" anchor="ctr" anchorCtr="0">
-            <a:noAutofit/>
-          </a:bodyPr>
-          <a:lstStyle/>
-          <a:p>
-            <a:pPr marL="0" lvl="0" indent="0" algn="l" rtl="0">
-              <a:spcBef>
-                <a:spcPts val="0"/>
-              </a:spcBef>
-              <a:spcAft>
-                <a:spcPts val="0"/>
-              </a:spcAft>
-              <a:buNone/>
-            </a:pPr>
-            <a:endParaRPr/>
-          </a:p>
-        </p:txBody>
-      </p:sp>
-      <p:sp>
-        <p:nvSpPr>
-          <p:cNvPr id="47" name="Google Shape;231;p17">
-            <a:extLst>
-              <a:ext uri="{FF2B5EF4-FFF2-40B4-BE49-F238E27FC236}">
-                <a16:creationId xmlns:a16="http://schemas.microsoft.com/office/drawing/2014/main" id="{24D6A97C-ECF6-D610-3517-D6A9D990E225}"/>
-              </a:ext>
-            </a:extLst>
-          </p:cNvPr>
-          <p:cNvSpPr/>
-          <p:nvPr/>
-        </p:nvSpPr>
-        <p:spPr>
-          <a:xfrm>
-            <a:off x="253089" y="58794"/>
-            <a:ext cx="530346" cy="952920"/>
-          </a:xfrm>
-          <a:custGeom>
-            <a:avLst/>
-            <a:gdLst/>
-            <a:ahLst/>
-            <a:cxnLst/>
-            <a:rect l="l" t="t" r="r" b="b"/>
-            <a:pathLst>
-              <a:path w="3325" h="6646" extrusionOk="0">
-                <a:moveTo>
-                  <a:pt x="3324" y="1"/>
-                </a:moveTo>
-                <a:cubicBezTo>
-                  <a:pt x="1488" y="1"/>
-                  <a:pt x="1" y="1487"/>
-                  <a:pt x="1" y="3324"/>
-                </a:cubicBezTo>
-                <a:cubicBezTo>
-                  <a:pt x="1" y="5161"/>
-                  <a:pt x="1488" y="6645"/>
-                  <a:pt x="3324" y="6645"/>
-                </a:cubicBezTo>
-                <a:lnTo>
-                  <a:pt x="3324" y="1"/>
-                </a:lnTo>
-                <a:close/>
-              </a:path>
-            </a:pathLst>
-          </a:custGeom>
-          <a:solidFill>
-            <a:srgbClr val="E89D06"/>
-          </a:solidFill>
-          <a:ln>
-            <a:noFill/>
-          </a:ln>
-          <a:effectLst>
-            <a:outerShdw blurRad="71438" dist="57150" dir="1140000" algn="bl" rotWithShape="0">
-              <a:schemeClr val="dk1">
-                <a:alpha val="20000"/>
-              </a:schemeClr>
-            </a:outerShdw>
-          </a:effectLst>
-        </p:spPr>
-        <p:txBody>
-          <a:bodyPr spcFirstLastPara="1" wrap="square" lIns="91425" tIns="91425" rIns="91425" bIns="91425" anchor="ctr" anchorCtr="0">
-            <a:noAutofit/>
-          </a:bodyPr>
-          <a:lstStyle/>
-          <a:p>
-            <a:pPr marL="0" lvl="0" indent="0" algn="l" rtl="0">
-              <a:spcBef>
-                <a:spcPts val="0"/>
-              </a:spcBef>
-              <a:spcAft>
-                <a:spcPts val="0"/>
-              </a:spcAft>
-              <a:buNone/>
-            </a:pPr>
-            <a:endParaRPr/>
-          </a:p>
-        </p:txBody>
-      </p:sp>
-      <p:sp>
-        <p:nvSpPr>
-          <p:cNvPr id="48" name="Google Shape;232;p17">
-            <a:extLst>
-              <a:ext uri="{FF2B5EF4-FFF2-40B4-BE49-F238E27FC236}">
-                <a16:creationId xmlns:a16="http://schemas.microsoft.com/office/drawing/2014/main" id="{2CE5ECA1-CAEA-2866-EB59-0F3F833CE207}"/>
-              </a:ext>
-            </a:extLst>
-          </p:cNvPr>
-          <p:cNvSpPr txBox="1"/>
-          <p:nvPr/>
-        </p:nvSpPr>
-        <p:spPr>
-          <a:xfrm>
-            <a:off x="398524" y="346314"/>
-            <a:ext cx="330000" cy="387300"/>
-          </a:xfrm>
-          <a:prstGeom prst="rect">
-            <a:avLst/>
-          </a:prstGeom>
-          <a:solidFill>
-            <a:srgbClr val="E89D06"/>
-          </a:solidFill>
-          <a:ln>
-            <a:noFill/>
-          </a:ln>
-        </p:spPr>
-        <p:txBody>
-          <a:bodyPr spcFirstLastPara="1" wrap="square" lIns="91425" tIns="91425" rIns="91425" bIns="91425" anchor="ctr" anchorCtr="0">
-            <a:noAutofit/>
-          </a:bodyPr>
-          <a:lstStyle/>
-          <a:p>
-            <a:pPr marL="0" lvl="0" indent="0" algn="l" rtl="0">
-              <a:lnSpc>
-                <a:spcPct val="100000"/>
-              </a:lnSpc>
-              <a:spcBef>
-                <a:spcPts val="0"/>
-              </a:spcBef>
-              <a:spcAft>
-                <a:spcPts val="0"/>
-              </a:spcAft>
-              <a:buNone/>
-            </a:pPr>
-            <a:r>
-              <a:rPr lang="en" sz="2000" b="1">
-                <a:solidFill>
-                  <a:schemeClr val="lt1"/>
-                </a:solidFill>
-                <a:latin typeface="Roboto"/>
-                <a:ea typeface="Roboto"/>
-                <a:cs typeface="Roboto"/>
-                <a:sym typeface="Roboto"/>
-              </a:rPr>
-              <a:t>+</a:t>
-            </a:r>
-            <a:endParaRPr sz="2000" b="1">
-              <a:solidFill>
-                <a:schemeClr val="lt1"/>
-              </a:solidFill>
-              <a:latin typeface="Roboto"/>
-              <a:ea typeface="Roboto"/>
-              <a:cs typeface="Roboto"/>
-              <a:sym typeface="Roboto"/>
-            </a:endParaRPr>
-          </a:p>
-        </p:txBody>
-      </p:sp>
-      <mc:AlternateContent xmlns:mc="http://schemas.openxmlformats.org/markup-compatibility/2006">
-        <mc:Choice xmlns:p14="http://schemas.microsoft.com/office/powerpoint/2010/main" Requires="p14">
-          <p:contentPart p14:bwMode="auto" r:id="rId2">
-            <p14:nvContentPartPr>
-              <p14:cNvPr id="5" name="Encre 4">
-                <a:extLst>
-                  <a:ext uri="{FF2B5EF4-FFF2-40B4-BE49-F238E27FC236}">
-                    <a16:creationId xmlns:a16="http://schemas.microsoft.com/office/drawing/2014/main" id="{50116876-367D-D0E0-A381-ED7AEF05F0E5}"/>
-                  </a:ext>
-                </a:extLst>
-              </p14:cNvPr>
-              <p14:cNvContentPartPr/>
-              <p14:nvPr/>
-            </p14:nvContentPartPr>
-            <p14:xfrm>
-              <a:off x="698625" y="3835762"/>
-              <a:ext cx="360" cy="360"/>
-            </p14:xfrm>
-          </p:contentPart>
-        </mc:Choice>
-        <mc:Fallback>
-          <p:pic>
-            <p:nvPicPr>
-              <p:cNvPr id="5" name="Encre 4">
-                <a:extLst>
-                  <a:ext uri="{FF2B5EF4-FFF2-40B4-BE49-F238E27FC236}">
-                    <a16:creationId xmlns:a16="http://schemas.microsoft.com/office/drawing/2014/main" id="{50116876-367D-D0E0-A381-ED7AEF05F0E5}"/>
-                  </a:ext>
-                </a:extLst>
-              </p:cNvPr>
-              <p:cNvPicPr/>
-              <p:nvPr/>
-            </p:nvPicPr>
-            <p:blipFill>
-              <a:blip r:embed="rId3"/>
-              <a:stretch>
-                <a:fillRect/>
-              </a:stretch>
-            </p:blipFill>
-            <p:spPr>
-              <a:xfrm>
-                <a:off x="692505" y="3829642"/>
-                <a:ext cx="12600" cy="12600"/>
-              </a:xfrm>
-              <a:prstGeom prst="rect">
-                <a:avLst/>
-              </a:prstGeom>
-            </p:spPr>
-          </p:pic>
-        </mc:Fallback>
-      </mc:AlternateContent>
-      <p:sp>
-        <p:nvSpPr>
-          <p:cNvPr id="45" name="ZoneTexte 44">
-            <a:extLst>
-              <a:ext uri="{FF2B5EF4-FFF2-40B4-BE49-F238E27FC236}">
-                <a16:creationId xmlns:a16="http://schemas.microsoft.com/office/drawing/2014/main" id="{FABC7306-F17F-4572-E4BD-4A7D05B1CCA9}"/>
-              </a:ext>
-            </a:extLst>
-          </p:cNvPr>
-          <p:cNvSpPr txBox="1"/>
-          <p:nvPr/>
-        </p:nvSpPr>
-        <p:spPr>
-          <a:xfrm>
-            <a:off x="824975" y="311564"/>
-            <a:ext cx="7330283" cy="453970"/>
-          </a:xfrm>
-          <a:prstGeom prst="rect">
-            <a:avLst/>
-          </a:prstGeom>
-          <a:noFill/>
-        </p:spPr>
-        <p:txBody>
-          <a:bodyPr wrap="square" lIns="68580" tIns="34290" rIns="68580" bIns="34290" rtlCol="0" anchor="t">
-            <a:spAutoFit/>
-          </a:bodyPr>
-          <a:lstStyle/>
-          <a:p>
-            <a:r>
-              <a:rPr lang="fr-FR" sz="2500" b="1" dirty="0">
-                <a:solidFill>
-                  <a:schemeClr val="bg1"/>
-                </a:solidFill>
-                <a:latin typeface="+mj-lt"/>
-              </a:rPr>
-              <a:t>Etapes pour réaliser l’ Analyse d’image</a:t>
-            </a:r>
-          </a:p>
-        </p:txBody>
-      </p:sp>
-      <p:sp>
-        <p:nvSpPr>
-          <p:cNvPr id="2" name="Rectangle 1">
-            <a:extLst>
-              <a:ext uri="{FF2B5EF4-FFF2-40B4-BE49-F238E27FC236}">
-                <a16:creationId xmlns:a16="http://schemas.microsoft.com/office/drawing/2014/main" id="{2F350F7C-CA1E-3A75-EDA3-AB1EB9BCE55E}"/>
-              </a:ext>
-            </a:extLst>
-          </p:cNvPr>
-          <p:cNvSpPr/>
-          <p:nvPr/>
-        </p:nvSpPr>
-        <p:spPr>
-          <a:xfrm>
-            <a:off x="2004724" y="1264484"/>
-            <a:ext cx="4567061" cy="362320"/>
-          </a:xfrm>
-          <a:prstGeom prst="rect">
-            <a:avLst/>
-          </a:prstGeom>
-        </p:spPr>
-        <p:style>
-          <a:lnRef idx="2">
-            <a:schemeClr val="dk1">
-              <a:shade val="15000"/>
-            </a:schemeClr>
-          </a:lnRef>
-          <a:fillRef idx="1">
-            <a:schemeClr val="dk1"/>
-          </a:fillRef>
-          <a:effectRef idx="0">
-            <a:schemeClr val="dk1"/>
-          </a:effectRef>
-          <a:fontRef idx="minor">
-            <a:schemeClr val="lt1"/>
-          </a:fontRef>
-        </p:style>
-        <p:txBody>
-          <a:bodyPr rtlCol="0" anchor="ctr"/>
-          <a:lstStyle/>
-          <a:p>
-            <a:pPr>
-              <a:lnSpc>
-                <a:spcPts val="1425"/>
-              </a:lnSpc>
-            </a:pPr>
-            <a:r>
-              <a:rPr lang="fr-FR" sz="1000" b="0" dirty="0" err="1">
-                <a:solidFill>
-                  <a:srgbClr val="E06C75"/>
-                </a:solidFill>
-                <a:effectLst/>
-                <a:latin typeface="Consolas" panose="020B0609020204030204" pitchFamily="49" charset="0"/>
-              </a:rPr>
-              <a:t>model</a:t>
-            </a:r>
-            <a:r>
-              <a:rPr lang="fr-FR" sz="1000" b="0" dirty="0" err="1">
-                <a:solidFill>
-                  <a:srgbClr val="ABB2BF"/>
-                </a:solidFill>
-                <a:effectLst/>
-                <a:latin typeface="Consolas" panose="020B0609020204030204" pitchFamily="49" charset="0"/>
-              </a:rPr>
-              <a:t>.</a:t>
-            </a:r>
-            <a:r>
-              <a:rPr lang="fr-FR" sz="1000" b="0" dirty="0" err="1">
-                <a:solidFill>
-                  <a:srgbClr val="61AFEF"/>
-                </a:solidFill>
-                <a:effectLst/>
-                <a:latin typeface="Consolas" panose="020B0609020204030204" pitchFamily="49" charset="0"/>
-              </a:rPr>
-              <a:t>write</a:t>
-            </a:r>
-            <a:r>
-              <a:rPr lang="fr-FR" sz="1000" b="0" dirty="0">
-                <a:solidFill>
-                  <a:srgbClr val="ABB2BF"/>
-                </a:solidFill>
-                <a:effectLst/>
-                <a:latin typeface="Consolas" panose="020B0609020204030204" pitchFamily="49" charset="0"/>
-              </a:rPr>
-              <a:t>().</a:t>
-            </a:r>
-            <a:r>
-              <a:rPr lang="fr-FR" sz="1000" b="0" dirty="0" err="1">
-                <a:solidFill>
-                  <a:srgbClr val="61AFEF"/>
-                </a:solidFill>
-                <a:effectLst/>
-                <a:latin typeface="Consolas" panose="020B0609020204030204" pitchFamily="49" charset="0"/>
-              </a:rPr>
-              <a:t>overwrite</a:t>
-            </a:r>
-            <a:r>
-              <a:rPr lang="fr-FR" sz="1000" b="0" dirty="0">
-                <a:solidFill>
-                  <a:srgbClr val="ABB2BF"/>
-                </a:solidFill>
-                <a:effectLst/>
-                <a:latin typeface="Consolas" panose="020B0609020204030204" pitchFamily="49" charset="0"/>
-              </a:rPr>
-              <a:t>().</a:t>
-            </a:r>
-            <a:r>
-              <a:rPr lang="fr-FR" sz="1000" b="0" dirty="0" err="1">
-                <a:solidFill>
-                  <a:srgbClr val="61AFEF"/>
-                </a:solidFill>
-                <a:effectLst/>
-                <a:latin typeface="Consolas" panose="020B0609020204030204" pitchFamily="49" charset="0"/>
-              </a:rPr>
-              <a:t>save</a:t>
-            </a:r>
-            <a:r>
-              <a:rPr lang="fr-FR" sz="1000" b="0" dirty="0">
-                <a:solidFill>
-                  <a:srgbClr val="ABB2BF"/>
-                </a:solidFill>
-                <a:effectLst/>
-                <a:latin typeface="Consolas" panose="020B0609020204030204" pitchFamily="49" charset="0"/>
-              </a:rPr>
-              <a:t>(</a:t>
-            </a:r>
-            <a:r>
-              <a:rPr lang="fr-FR" sz="1000" b="0" dirty="0">
-                <a:solidFill>
-                  <a:srgbClr val="98C379"/>
-                </a:solidFill>
-                <a:effectLst/>
-                <a:latin typeface="Consolas" panose="020B0609020204030204" pitchFamily="49" charset="0"/>
-              </a:rPr>
-              <a:t>"</a:t>
-            </a:r>
-            <a:r>
-              <a:rPr lang="fr-FR" sz="1000" b="0" dirty="0" err="1">
-                <a:solidFill>
-                  <a:srgbClr val="98C379"/>
-                </a:solidFill>
-                <a:effectLst/>
-                <a:latin typeface="Consolas" panose="020B0609020204030204" pitchFamily="49" charset="0"/>
-              </a:rPr>
-              <a:t>modeles</a:t>
-            </a:r>
-            <a:r>
-              <a:rPr lang="fr-FR" sz="1000" b="0" dirty="0">
-                <a:solidFill>
-                  <a:srgbClr val="98C379"/>
-                </a:solidFill>
-                <a:effectLst/>
-                <a:latin typeface="Consolas" panose="020B0609020204030204" pitchFamily="49" charset="0"/>
-              </a:rPr>
-              <a:t>/</a:t>
-            </a:r>
-            <a:r>
-              <a:rPr lang="fr-FR" sz="1000" b="0" dirty="0" err="1">
-                <a:solidFill>
-                  <a:srgbClr val="98C379"/>
-                </a:solidFill>
-                <a:effectLst/>
-                <a:latin typeface="Consolas" panose="020B0609020204030204" pitchFamily="49" charset="0"/>
-              </a:rPr>
-              <a:t>modelesRegression</a:t>
-            </a:r>
-            <a:r>
-              <a:rPr lang="fr-FR" sz="1000" b="0" dirty="0">
-                <a:solidFill>
-                  <a:srgbClr val="98C379"/>
-                </a:solidFill>
-                <a:effectLst/>
-                <a:latin typeface="Consolas" panose="020B0609020204030204" pitchFamily="49" charset="0"/>
-              </a:rPr>
-              <a:t>"</a:t>
-            </a:r>
-            <a:r>
-              <a:rPr lang="fr-FR" sz="1000" b="0" dirty="0">
-                <a:solidFill>
-                  <a:srgbClr val="ABB2BF"/>
-                </a:solidFill>
-                <a:effectLst/>
-                <a:latin typeface="Consolas" panose="020B0609020204030204" pitchFamily="49" charset="0"/>
-              </a:rPr>
-              <a:t>)</a:t>
-            </a:r>
-          </a:p>
-        </p:txBody>
-      </p:sp>
-      <p:pic>
-        <p:nvPicPr>
-          <p:cNvPr id="8" name="Image 7">
-            <a:extLst>
-              <a:ext uri="{FF2B5EF4-FFF2-40B4-BE49-F238E27FC236}">
-                <a16:creationId xmlns:a16="http://schemas.microsoft.com/office/drawing/2014/main" id="{FB1B6D53-98E1-8B20-BBE7-457FBDF09354}"/>
-              </a:ext>
-            </a:extLst>
-          </p:cNvPr>
-          <p:cNvPicPr>
-            <a:picLocks noChangeAspect="1"/>
-          </p:cNvPicPr>
-          <p:nvPr/>
-        </p:nvPicPr>
-        <p:blipFill>
-          <a:blip r:embed="rId4"/>
-          <a:stretch>
-            <a:fillRect/>
-          </a:stretch>
-        </p:blipFill>
-        <p:spPr>
-          <a:xfrm>
-            <a:off x="532577" y="2230144"/>
-            <a:ext cx="7622681" cy="1466537"/>
-          </a:xfrm>
-          <a:prstGeom prst="rect">
-            <a:avLst/>
-          </a:prstGeom>
-        </p:spPr>
-      </p:pic>
-      <p:sp>
-        <p:nvSpPr>
-          <p:cNvPr id="12" name="Rectangle 11">
-            <a:extLst>
-              <a:ext uri="{FF2B5EF4-FFF2-40B4-BE49-F238E27FC236}">
-                <a16:creationId xmlns:a16="http://schemas.microsoft.com/office/drawing/2014/main" id="{48079C1A-C532-8F8A-9077-58CF3B85614C}"/>
-              </a:ext>
-            </a:extLst>
-          </p:cNvPr>
-          <p:cNvSpPr/>
-          <p:nvPr/>
-        </p:nvSpPr>
-        <p:spPr>
-          <a:xfrm>
-            <a:off x="2004724" y="3995197"/>
-            <a:ext cx="4567061" cy="582461"/>
-          </a:xfrm>
-          <a:prstGeom prst="rect">
-            <a:avLst/>
-          </a:prstGeom>
-        </p:spPr>
-        <p:style>
-          <a:lnRef idx="2">
-            <a:schemeClr val="dk1">
-              <a:shade val="15000"/>
-            </a:schemeClr>
-          </a:lnRef>
-          <a:fillRef idx="1">
-            <a:schemeClr val="dk1"/>
-          </a:fillRef>
-          <a:effectRef idx="0">
-            <a:schemeClr val="dk1"/>
-          </a:effectRef>
-          <a:fontRef idx="minor">
-            <a:schemeClr val="lt1"/>
-          </a:fontRef>
-        </p:style>
-        <p:txBody>
-          <a:bodyPr rtlCol="0" anchor="ctr"/>
-          <a:lstStyle/>
-          <a:p>
-            <a:pPr>
-              <a:lnSpc>
-                <a:spcPts val="1425"/>
-              </a:lnSpc>
-            </a:pPr>
-            <a:r>
-              <a:rPr lang="fr-FR" sz="1000" b="0">
-                <a:solidFill>
-                  <a:srgbClr val="C678DD"/>
-                </a:solidFill>
-                <a:effectLst/>
-                <a:latin typeface="Consolas" panose="020B0609020204030204" pitchFamily="49" charset="0"/>
-              </a:rPr>
-              <a:t>from</a:t>
-            </a:r>
-            <a:r>
-              <a:rPr lang="fr-FR" sz="1000" b="0">
-                <a:solidFill>
-                  <a:srgbClr val="ABB2BF"/>
-                </a:solidFill>
-                <a:effectLst/>
-                <a:latin typeface="Consolas" panose="020B0609020204030204" pitchFamily="49" charset="0"/>
-              </a:rPr>
-              <a:t> pyspark.ml.pipeline </a:t>
-            </a:r>
-            <a:r>
-              <a:rPr lang="fr-FR" sz="1000" b="0">
-                <a:solidFill>
-                  <a:srgbClr val="C678DD"/>
-                </a:solidFill>
-                <a:effectLst/>
-                <a:latin typeface="Consolas" panose="020B0609020204030204" pitchFamily="49" charset="0"/>
-              </a:rPr>
-              <a:t>import</a:t>
-            </a:r>
-            <a:r>
-              <a:rPr lang="fr-FR" sz="1000" b="0">
-                <a:solidFill>
-                  <a:srgbClr val="ABB2BF"/>
-                </a:solidFill>
-                <a:effectLst/>
-                <a:latin typeface="Consolas" panose="020B0609020204030204" pitchFamily="49" charset="0"/>
-              </a:rPr>
-              <a:t> PipelineModel</a:t>
-            </a:r>
-          </a:p>
-          <a:p>
-            <a:pPr>
-              <a:lnSpc>
-                <a:spcPts val="1425"/>
-              </a:lnSpc>
-            </a:pPr>
-            <a:r>
-              <a:rPr lang="fr-FR" sz="1000" b="0">
-                <a:solidFill>
-                  <a:srgbClr val="E06C75"/>
-                </a:solidFill>
-                <a:effectLst/>
-                <a:latin typeface="Consolas" panose="020B0609020204030204" pitchFamily="49" charset="0"/>
-              </a:rPr>
-              <a:t>model</a:t>
-            </a:r>
-            <a:r>
-              <a:rPr lang="fr-FR" sz="1000" b="0">
-                <a:solidFill>
-                  <a:srgbClr val="ABB2BF"/>
-                </a:solidFill>
-                <a:effectLst/>
-                <a:latin typeface="Consolas" panose="020B0609020204030204" pitchFamily="49" charset="0"/>
-              </a:rPr>
-              <a:t> </a:t>
-            </a:r>
-            <a:r>
-              <a:rPr lang="fr-FR" sz="1000" b="0">
-                <a:solidFill>
-                  <a:srgbClr val="56B6C2"/>
-                </a:solidFill>
-                <a:effectLst/>
-                <a:latin typeface="Consolas" panose="020B0609020204030204" pitchFamily="49" charset="0"/>
-              </a:rPr>
-              <a:t>=</a:t>
-            </a:r>
-            <a:r>
-              <a:rPr lang="fr-FR" sz="1000" b="0">
-                <a:solidFill>
-                  <a:srgbClr val="ABB2BF"/>
-                </a:solidFill>
-                <a:effectLst/>
-                <a:latin typeface="Consolas" panose="020B0609020204030204" pitchFamily="49" charset="0"/>
-              </a:rPr>
-              <a:t> PipelineModel.</a:t>
-            </a:r>
-            <a:r>
-              <a:rPr lang="fr-FR" sz="1000" b="0">
-                <a:solidFill>
-                  <a:srgbClr val="61AFEF"/>
-                </a:solidFill>
-                <a:effectLst/>
-                <a:latin typeface="Consolas" panose="020B0609020204030204" pitchFamily="49" charset="0"/>
-              </a:rPr>
-              <a:t>load</a:t>
-            </a:r>
-            <a:r>
-              <a:rPr lang="fr-FR" sz="1000" b="0">
-                <a:solidFill>
-                  <a:srgbClr val="ABB2BF"/>
-                </a:solidFill>
-                <a:effectLst/>
-                <a:latin typeface="Consolas" panose="020B0609020204030204" pitchFamily="49" charset="0"/>
-              </a:rPr>
-              <a:t>(</a:t>
-            </a:r>
-            <a:r>
-              <a:rPr lang="fr-FR" sz="1000" b="0">
-                <a:solidFill>
-                  <a:srgbClr val="98C379"/>
-                </a:solidFill>
-                <a:effectLst/>
-                <a:latin typeface="Consolas" panose="020B0609020204030204" pitchFamily="49" charset="0"/>
-              </a:rPr>
-              <a:t>"modeles/modelesRegression"</a:t>
-            </a:r>
-            <a:r>
-              <a:rPr lang="fr-FR" sz="1000" b="0">
-                <a:solidFill>
-                  <a:srgbClr val="ABB2BF"/>
-                </a:solidFill>
-                <a:effectLst/>
-                <a:latin typeface="Consolas" panose="020B0609020204030204" pitchFamily="49" charset="0"/>
-              </a:rPr>
-              <a:t>)</a:t>
-            </a:r>
-          </a:p>
-        </p:txBody>
-      </p:sp>
-    </p:spTree>
-    <p:extLst>
-      <p:ext uri="{BB962C8B-B14F-4D97-AF65-F5344CB8AC3E}">
-        <p14:creationId xmlns:p14="http://schemas.microsoft.com/office/powerpoint/2010/main" val="2725452353"/>
-      </p:ext>
-    </p:extLst>
-  </p:cSld>
-  <p:clrMapOvr>
-    <a:masterClrMapping/>
-  </p:clrMapOvr>
-</p:sld>
-</file>
-
-<file path=ppt/slides/slide21.xml><?xml version="1.0" encoding="utf-8"?>
-<p:sld xmlns:a="http://schemas.openxmlformats.org/drawingml/2006/main" xmlns:r="http://schemas.openxmlformats.org/officeDocument/2006/relationships" xmlns:p="http://schemas.openxmlformats.org/presentationml/2006/main">
-  <p:cSld>
-    <p:spTree>
-      <p:nvGrpSpPr>
-        <p:cNvPr id="1" name="">
-          <a:extLst>
-            <a:ext uri="{FF2B5EF4-FFF2-40B4-BE49-F238E27FC236}">
               <a16:creationId xmlns:a16="http://schemas.microsoft.com/office/drawing/2014/main" id="{8209004D-ECF3-6AB0-732F-D0EE0D9C40DF}"/>
             </a:ext>
           </a:extLst>
@@ -18359,8 +17397,8 @@
           </a:p>
         </p:txBody>
       </p:sp>
-      <mc:AlternateContent xmlns:mc="http://schemas.openxmlformats.org/markup-compatibility/2006">
-        <mc:Choice xmlns:p14="http://schemas.microsoft.com/office/powerpoint/2010/main" Requires="p14">
+      <mc:AlternateContent xmlns:mc="http://schemas.openxmlformats.org/markup-compatibility/2006" xmlns:p14="http://schemas.microsoft.com/office/powerpoint/2010/main">
+        <mc:Choice Requires="p14">
           <p:contentPart p14:bwMode="auto" r:id="rId2">
             <p14:nvContentPartPr>
               <p14:cNvPr id="5" name="Encre 4">
@@ -18379,7 +17417,7 @@
             </p14:xfrm>
           </p:contentPart>
         </mc:Choice>
-        <mc:Fallback>
+        <mc:Fallback xmlns="">
           <p:pic>
             <p:nvPicPr>
               <p:cNvPr id="5" name="Encre 4">
@@ -18945,7 +17983,7 @@
 </p:sld>
 </file>
 
-<file path=ppt/slides/slide22.xml><?xml version="1.0" encoding="utf-8"?>
+<file path=ppt/slides/slide21.xml><?xml version="1.0" encoding="utf-8"?>
 <p:sld xmlns:a="http://schemas.openxmlformats.org/drawingml/2006/main" xmlns:r="http://schemas.openxmlformats.org/officeDocument/2006/relationships" xmlns:p="http://schemas.openxmlformats.org/presentationml/2006/main">
   <p:cSld>
     <p:spTree>
@@ -18983,7 +18021,7 @@
         <p:spPr>
           <a:xfrm>
             <a:off x="365918" y="1041315"/>
-            <a:ext cx="8146180" cy="851515"/>
+            <a:ext cx="8146180" cy="1138773"/>
           </a:xfrm>
           <a:prstGeom prst="rect">
             <a:avLst/>
@@ -19026,7 +18064,38 @@
                 <a:ea typeface="Calibri" panose="020F0502020204030204" pitchFamily="34" charset="0"/>
                 <a:cs typeface="Arial" panose="020B0604020202020204" pitchFamily="34" charset="0"/>
               </a:rPr>
-              <a:t>Utiliser le modèle créer en ligne de commande pour Evaluer une image transmise ou un dossier: prediction_chat_chien.py.</a:t>
+              <a:t>Utiliser le modèle créer en ligne de commande pour Evaluer une image transmise ou un dossier</a:t>
+            </a:r>
+          </a:p>
+          <a:p>
+            <a:pPr>
+              <a:spcBef>
+                <a:spcPts val="400"/>
+              </a:spcBef>
+              <a:spcAft>
+                <a:spcPts val="400"/>
+              </a:spcAft>
+            </a:pPr>
+            <a:r>
+              <a:rPr lang="fr-FR" sz="1200" dirty="0">
+                <a:ea typeface="Calibri" panose="020F0502020204030204" pitchFamily="34" charset="0"/>
+                <a:cs typeface="Arial" panose="020B0604020202020204" pitchFamily="34" charset="0"/>
+              </a:rPr>
+              <a:t>Créer le fichier: prediction_chat_chien.py dans le répertoire ~/</a:t>
+            </a:r>
+            <a:r>
+              <a:rPr lang="fr-FR" sz="1200" dirty="0" err="1">
+                <a:ea typeface="Calibri" panose="020F0502020204030204" pitchFamily="34" charset="0"/>
+                <a:cs typeface="Arial" panose="020B0604020202020204" pitchFamily="34" charset="0"/>
+              </a:rPr>
+              <a:t>spark</a:t>
+            </a:r>
+            <a:r>
+              <a:rPr lang="fr-FR" sz="1200" dirty="0">
+                <a:ea typeface="Calibri" panose="020F0502020204030204" pitchFamily="34" charset="0"/>
+                <a:cs typeface="Arial" panose="020B0604020202020204" pitchFamily="34" charset="0"/>
+              </a:rPr>
+              <a:t>/data sur la machine principale.</a:t>
             </a:r>
           </a:p>
           <a:p>
@@ -19276,8 +18345,8 @@
           </a:p>
         </p:txBody>
       </p:sp>
-      <mc:AlternateContent xmlns:mc="http://schemas.openxmlformats.org/markup-compatibility/2006">
-        <mc:Choice xmlns:p14="http://schemas.microsoft.com/office/powerpoint/2010/main" Requires="p14">
+      <mc:AlternateContent xmlns:mc="http://schemas.openxmlformats.org/markup-compatibility/2006" xmlns:p14="http://schemas.microsoft.com/office/powerpoint/2010/main">
+        <mc:Choice Requires="p14">
           <p:contentPart p14:bwMode="auto" r:id="rId2">
             <p14:nvContentPartPr>
               <p14:cNvPr id="5" name="Encre 4">
@@ -19296,7 +18365,7 @@
             </p14:xfrm>
           </p:contentPart>
         </mc:Choice>
-        <mc:Fallback>
+        <mc:Fallback xmlns="">
           <p:pic>
             <p:nvPicPr>
               <p:cNvPr id="5" name="Encre 4">
@@ -19381,7 +18450,7 @@
         </p:nvSpPr>
         <p:spPr>
           <a:xfrm>
-            <a:off x="1774265" y="1643162"/>
+            <a:off x="1774265" y="2102756"/>
             <a:ext cx="4567061" cy="2861210"/>
           </a:xfrm>
           <a:prstGeom prst="rect">
@@ -20207,7 +19276,7 @@
 </p:sld>
 </file>
 
-<file path=ppt/slides/slide23.xml><?xml version="1.0" encoding="utf-8"?>
+<file path=ppt/slides/slide22.xml><?xml version="1.0" encoding="utf-8"?>
 <p:sld xmlns:a="http://schemas.openxmlformats.org/drawingml/2006/main" xmlns:r="http://schemas.openxmlformats.org/officeDocument/2006/relationships" xmlns:p="http://schemas.openxmlformats.org/presentationml/2006/main">
   <p:cSld>
     <p:spTree>
@@ -20521,8 +19590,8 @@
           </a:p>
         </p:txBody>
       </p:sp>
-      <mc:AlternateContent xmlns:mc="http://schemas.openxmlformats.org/markup-compatibility/2006">
-        <mc:Choice xmlns:p14="http://schemas.microsoft.com/office/powerpoint/2010/main" Requires="p14">
+      <mc:AlternateContent xmlns:mc="http://schemas.openxmlformats.org/markup-compatibility/2006" xmlns:p14="http://schemas.microsoft.com/office/powerpoint/2010/main">
+        <mc:Choice Requires="p14">
           <p:contentPart p14:bwMode="auto" r:id="rId2">
             <p14:nvContentPartPr>
               <p14:cNvPr id="5" name="Encre 4">
@@ -20541,7 +19610,7 @@
             </p14:xfrm>
           </p:contentPart>
         </mc:Choice>
-        <mc:Fallback>
+        <mc:Fallback xmlns="">
           <p:pic>
             <p:nvPicPr>
               <p:cNvPr id="5" name="Encre 4">
@@ -21846,7 +20915,7 @@
 </p:sld>
 </file>
 
-<file path=ppt/slides/slide24.xml><?xml version="1.0" encoding="utf-8"?>
+<file path=ppt/slides/slide23.xml><?xml version="1.0" encoding="utf-8"?>
 <p:sld xmlns:a="http://schemas.openxmlformats.org/drawingml/2006/main" xmlns:r="http://schemas.openxmlformats.org/officeDocument/2006/relationships" xmlns:p="http://schemas.openxmlformats.org/presentationml/2006/main">
   <p:cSld>
     <p:spTree>
@@ -22177,8 +21246,8 @@
           </a:p>
         </p:txBody>
       </p:sp>
-      <mc:AlternateContent xmlns:mc="http://schemas.openxmlformats.org/markup-compatibility/2006">
-        <mc:Choice xmlns:p14="http://schemas.microsoft.com/office/powerpoint/2010/main" Requires="p14">
+      <mc:AlternateContent xmlns:mc="http://schemas.openxmlformats.org/markup-compatibility/2006" xmlns:p14="http://schemas.microsoft.com/office/powerpoint/2010/main">
+        <mc:Choice Requires="p14">
           <p:contentPart p14:bwMode="auto" r:id="rId2">
             <p14:nvContentPartPr>
               <p14:cNvPr id="5" name="Encre 4">
@@ -22197,7 +21266,7 @@
             </p14:xfrm>
           </p:contentPart>
         </mc:Choice>
-        <mc:Fallback>
+        <mc:Fallback xmlns="">
           <p:pic>
             <p:nvPicPr>
               <p:cNvPr id="5" name="Encre 4">
@@ -22727,7 +21796,7 @@
 </p:sld>
 </file>
 
-<file path=ppt/slides/slide25.xml><?xml version="1.0" encoding="utf-8"?>
+<file path=ppt/slides/slide24.xml><?xml version="1.0" encoding="utf-8"?>
 <p:sld xmlns:a="http://schemas.openxmlformats.org/drawingml/2006/main" xmlns:r="http://schemas.openxmlformats.org/officeDocument/2006/relationships" xmlns:p="http://schemas.openxmlformats.org/presentationml/2006/main">
   <p:cSld>
     <p:spTree>
@@ -23041,8 +22110,8 @@
           </a:p>
         </p:txBody>
       </p:sp>
-      <mc:AlternateContent xmlns:mc="http://schemas.openxmlformats.org/markup-compatibility/2006">
-        <mc:Choice xmlns:p14="http://schemas.microsoft.com/office/powerpoint/2010/main" Requires="p14">
+      <mc:AlternateContent xmlns:mc="http://schemas.openxmlformats.org/markup-compatibility/2006" xmlns:p14="http://schemas.microsoft.com/office/powerpoint/2010/main">
+        <mc:Choice Requires="p14">
           <p:contentPart p14:bwMode="auto" r:id="rId2">
             <p14:nvContentPartPr>
               <p14:cNvPr id="5" name="Encre 4">
@@ -23061,7 +22130,7 @@
             </p14:xfrm>
           </p:contentPart>
         </mc:Choice>
-        <mc:Fallback>
+        <mc:Fallback xmlns="">
           <p:pic>
             <p:nvPicPr>
               <p:cNvPr id="5" name="Encre 4">
@@ -24985,7 +24054,7 @@
 </p:sld>
 </file>
 
-<file path=ppt/slides/slide26.xml><?xml version="1.0" encoding="utf-8"?>
+<file path=ppt/slides/slide25.xml><?xml version="1.0" encoding="utf-8"?>
 <p:sld xmlns:a="http://schemas.openxmlformats.org/drawingml/2006/main" xmlns:r="http://schemas.openxmlformats.org/officeDocument/2006/relationships" xmlns:p="http://schemas.openxmlformats.org/presentationml/2006/main">
   <p:cSld>
     <p:spTree>
@@ -25316,8 +24385,8 @@
           </a:p>
         </p:txBody>
       </p:sp>
-      <mc:AlternateContent xmlns:mc="http://schemas.openxmlformats.org/markup-compatibility/2006">
-        <mc:Choice xmlns:p14="http://schemas.microsoft.com/office/powerpoint/2010/main" Requires="p14">
+      <mc:AlternateContent xmlns:mc="http://schemas.openxmlformats.org/markup-compatibility/2006" xmlns:p14="http://schemas.microsoft.com/office/powerpoint/2010/main">
+        <mc:Choice Requires="p14">
           <p:contentPart p14:bwMode="auto" r:id="rId2">
             <p14:nvContentPartPr>
               <p14:cNvPr id="5" name="Encre 4">
@@ -25336,7 +24405,7 @@
             </p14:xfrm>
           </p:contentPart>
         </mc:Choice>
-        <mc:Fallback>
+        <mc:Fallback xmlns="">
           <p:pic>
             <p:nvPicPr>
               <p:cNvPr id="5" name="Encre 4">
@@ -26861,7 +25930,7 @@
 </p:sld>
 </file>
 
-<file path=ppt/slides/slide27.xml><?xml version="1.0" encoding="utf-8"?>
+<file path=ppt/slides/slide26.xml><?xml version="1.0" encoding="utf-8"?>
 <p:sld xmlns:a="http://schemas.openxmlformats.org/drawingml/2006/main" xmlns:r="http://schemas.openxmlformats.org/officeDocument/2006/relationships" xmlns:p="http://schemas.openxmlformats.org/presentationml/2006/main">
   <p:cSld>
     <p:spTree>
@@ -27161,8 +26230,8 @@
           </a:p>
         </p:txBody>
       </p:sp>
-      <mc:AlternateContent xmlns:mc="http://schemas.openxmlformats.org/markup-compatibility/2006">
-        <mc:Choice xmlns:p14="http://schemas.microsoft.com/office/powerpoint/2010/main" Requires="p14">
+      <mc:AlternateContent xmlns:mc="http://schemas.openxmlformats.org/markup-compatibility/2006" xmlns:p14="http://schemas.microsoft.com/office/powerpoint/2010/main">
+        <mc:Choice Requires="p14">
           <p:contentPart p14:bwMode="auto" r:id="rId2">
             <p14:nvContentPartPr>
               <p14:cNvPr id="5" name="Encre 4">
@@ -27181,7 +26250,7 @@
             </p14:xfrm>
           </p:contentPart>
         </mc:Choice>
-        <mc:Fallback>
+        <mc:Fallback xmlns="">
           <p:pic>
             <p:nvPicPr>
               <p:cNvPr id="5" name="Encre 4">
@@ -28612,7 +27681,7 @@
 </p:sld>
 </file>
 
-<file path=ppt/slides/slide28.xml><?xml version="1.0" encoding="utf-8"?>
+<file path=ppt/slides/slide27.xml><?xml version="1.0" encoding="utf-8"?>
 <p:sld xmlns:a="http://schemas.openxmlformats.org/drawingml/2006/main" xmlns:r="http://schemas.openxmlformats.org/officeDocument/2006/relationships" xmlns:p="http://schemas.openxmlformats.org/presentationml/2006/main">
   <p:cSld>
     <p:spTree>
@@ -28912,8 +27981,8 @@
           </a:p>
         </p:txBody>
       </p:sp>
-      <mc:AlternateContent xmlns:mc="http://schemas.openxmlformats.org/markup-compatibility/2006">
-        <mc:Choice xmlns:p14="http://schemas.microsoft.com/office/powerpoint/2010/main" Requires="p14">
+      <mc:AlternateContent xmlns:mc="http://schemas.openxmlformats.org/markup-compatibility/2006" xmlns:p14="http://schemas.microsoft.com/office/powerpoint/2010/main">
+        <mc:Choice Requires="p14">
           <p:contentPart p14:bwMode="auto" r:id="rId2">
             <p14:nvContentPartPr>
               <p14:cNvPr id="5" name="Encre 4">
@@ -28932,7 +28001,7 @@
             </p14:xfrm>
           </p:contentPart>
         </mc:Choice>
-        <mc:Fallback>
+        <mc:Fallback xmlns="">
           <p:pic>
             <p:nvPicPr>
               <p:cNvPr id="5" name="Encre 4">
@@ -30367,7 +29436,7 @@
 </p:sld>
 </file>
 
-<file path=ppt/slides/slide29.xml><?xml version="1.0" encoding="utf-8"?>
+<file path=ppt/slides/slide28.xml><?xml version="1.0" encoding="utf-8"?>
 <p:sld xmlns:a="http://schemas.openxmlformats.org/drawingml/2006/main" xmlns:r="http://schemas.openxmlformats.org/officeDocument/2006/relationships" xmlns:p="http://schemas.openxmlformats.org/presentationml/2006/main">
   <p:cSld>
     <p:spTree>
@@ -30788,8 +29857,8 @@
           </a:p>
         </p:txBody>
       </p:sp>
-      <mc:AlternateContent xmlns:mc="http://schemas.openxmlformats.org/markup-compatibility/2006">
-        <mc:Choice xmlns:p14="http://schemas.microsoft.com/office/powerpoint/2010/main" Requires="p14">
+      <mc:AlternateContent xmlns:mc="http://schemas.openxmlformats.org/markup-compatibility/2006" xmlns:p14="http://schemas.microsoft.com/office/powerpoint/2010/main">
+        <mc:Choice Requires="p14">
           <p:contentPart p14:bwMode="auto" r:id="rId2">
             <p14:nvContentPartPr>
               <p14:cNvPr id="5" name="Encre 4">
@@ -30808,7 +29877,7 @@
             </p14:xfrm>
           </p:contentPart>
         </mc:Choice>
-        <mc:Fallback>
+        <mc:Fallback xmlns="">
           <p:pic>
             <p:nvPicPr>
               <p:cNvPr id="5" name="Encre 4">
@@ -31279,6 +30348,966 @@
     <p:extLst>
       <p:ext uri="{BB962C8B-B14F-4D97-AF65-F5344CB8AC3E}">
         <p14:creationId xmlns:p14="http://schemas.microsoft.com/office/powerpoint/2010/main" val="2589468431"/>
+      </p:ext>
+    </p:extLst>
+  </p:cSld>
+  <p:clrMapOvr>
+    <a:masterClrMapping/>
+  </p:clrMapOvr>
+</p:sld>
+</file>
+
+<file path=ppt/slides/slide29.xml><?xml version="1.0" encoding="utf-8"?>
+<p:sld xmlns:a="http://schemas.openxmlformats.org/drawingml/2006/main" xmlns:r="http://schemas.openxmlformats.org/officeDocument/2006/relationships" xmlns:p="http://schemas.openxmlformats.org/presentationml/2006/main">
+  <p:cSld>
+    <p:spTree>
+      <p:nvGrpSpPr>
+        <p:cNvPr id="1" name="">
+          <a:extLst>
+            <a:ext uri="{FF2B5EF4-FFF2-40B4-BE49-F238E27FC236}">
+              <a16:creationId xmlns:a16="http://schemas.microsoft.com/office/drawing/2014/main" id="{E1F9B66C-45E1-27A5-B671-7B3C9717056E}"/>
+            </a:ext>
+          </a:extLst>
+        </p:cNvPr>
+        <p:cNvGrpSpPr/>
+        <p:nvPr/>
+      </p:nvGrpSpPr>
+      <p:grpSpPr>
+        <a:xfrm>
+          <a:off x="0" y="0"/>
+          <a:ext cx="0" cy="0"/>
+          <a:chOff x="0" y="0"/>
+          <a:chExt cx="0" cy="0"/>
+        </a:xfrm>
+      </p:grpSpPr>
+      <p:sp>
+        <p:nvSpPr>
+          <p:cNvPr id="40" name="ZoneTexte 39">
+            <a:extLst>
+              <a:ext uri="{FF2B5EF4-FFF2-40B4-BE49-F238E27FC236}">
+                <a16:creationId xmlns:a16="http://schemas.microsoft.com/office/drawing/2014/main" id="{DF76492F-E52B-17A9-82BB-16B00C06EB9D}"/>
+              </a:ext>
+            </a:extLst>
+          </p:cNvPr>
+          <p:cNvSpPr txBox="1"/>
+          <p:nvPr/>
+        </p:nvSpPr>
+        <p:spPr>
+          <a:xfrm>
+            <a:off x="365918" y="1041315"/>
+            <a:ext cx="8146180" cy="3149580"/>
+          </a:xfrm>
+          <a:prstGeom prst="rect">
+            <a:avLst/>
+          </a:prstGeom>
+          <a:noFill/>
+        </p:spPr>
+        <p:txBody>
+          <a:bodyPr wrap="square" rtlCol="0">
+            <a:spAutoFit/>
+          </a:bodyPr>
+          <a:lstStyle/>
+          <a:p>
+            <a:pPr algn="just">
+              <a:spcBef>
+                <a:spcPts val="400"/>
+              </a:spcBef>
+              <a:spcAft>
+                <a:spcPts val="400"/>
+              </a:spcAft>
+            </a:pPr>
+            <a:r>
+              <a:rPr lang="fr-FR" sz="1200" dirty="0">
+                <a:ea typeface="Calibri" panose="020F0502020204030204" pitchFamily="34" charset="0"/>
+                <a:cs typeface="Arial" panose="020B0604020202020204" pitchFamily="34" charset="0"/>
+              </a:rPr>
+              <a:t>Application: </a:t>
+            </a:r>
+          </a:p>
+          <a:p>
+            <a:pPr algn="just">
+              <a:spcBef>
+                <a:spcPts val="400"/>
+              </a:spcBef>
+              <a:spcAft>
+                <a:spcPts val="400"/>
+              </a:spcAft>
+            </a:pPr>
+            <a:r>
+              <a:rPr lang="fr-FR" sz="1200" dirty="0">
+                <a:ea typeface="Calibri" panose="020F0502020204030204" pitchFamily="34" charset="0"/>
+                <a:cs typeface="Arial" panose="020B0604020202020204" pitchFamily="34" charset="0"/>
+              </a:rPr>
+              <a:t>Pour récupérer le modèle qui est sauvegardé dans le container </a:t>
+            </a:r>
+            <a:r>
+              <a:rPr lang="fr-FR" sz="1200" dirty="0" err="1">
+                <a:ea typeface="Calibri" panose="020F0502020204030204" pitchFamily="34" charset="0"/>
+                <a:cs typeface="Arial" panose="020B0604020202020204" pitchFamily="34" charset="0"/>
+              </a:rPr>
+              <a:t>jupyter</a:t>
+            </a:r>
+            <a:r>
+              <a:rPr lang="fr-FR" sz="1200" dirty="0">
+                <a:ea typeface="Calibri" panose="020F0502020204030204" pitchFamily="34" charset="0"/>
+                <a:cs typeface="Arial" panose="020B0604020202020204" pitchFamily="34" charset="0"/>
+              </a:rPr>
+              <a:t> et le mettre dans le container </a:t>
+            </a:r>
+            <a:r>
+              <a:rPr lang="fr-FR" sz="1200" dirty="0" err="1">
+                <a:ea typeface="Calibri" panose="020F0502020204030204" pitchFamily="34" charset="0"/>
+                <a:cs typeface="Arial" panose="020B0604020202020204" pitchFamily="34" charset="0"/>
+              </a:rPr>
+              <a:t>spark</a:t>
+            </a:r>
+            <a:r>
+              <a:rPr lang="fr-FR" sz="1200" dirty="0">
+                <a:ea typeface="Calibri" panose="020F0502020204030204" pitchFamily="34" charset="0"/>
+                <a:cs typeface="Arial" panose="020B0604020202020204" pitchFamily="34" charset="0"/>
+              </a:rPr>
+              <a:t>-master.</a:t>
+            </a:r>
+          </a:p>
+          <a:p>
+            <a:pPr algn="just">
+              <a:spcBef>
+                <a:spcPts val="400"/>
+              </a:spcBef>
+              <a:spcAft>
+                <a:spcPts val="400"/>
+              </a:spcAft>
+            </a:pPr>
+            <a:r>
+              <a:rPr lang="fr-FR" sz="1200" dirty="0">
+                <a:ea typeface="Calibri" panose="020F0502020204030204" pitchFamily="34" charset="0"/>
+                <a:cs typeface="Arial" panose="020B0604020202020204" pitchFamily="34" charset="0"/>
+              </a:rPr>
+              <a:t>Se mettre dans le container </a:t>
+            </a:r>
+            <a:r>
+              <a:rPr lang="fr-FR" sz="1200" dirty="0" err="1">
+                <a:ea typeface="Calibri" panose="020F0502020204030204" pitchFamily="34" charset="0"/>
+                <a:cs typeface="Arial" panose="020B0604020202020204" pitchFamily="34" charset="0"/>
+              </a:rPr>
+              <a:t>jupyter</a:t>
+            </a:r>
+            <a:endParaRPr lang="fr-FR" sz="1200" dirty="0">
+              <a:ea typeface="Calibri" panose="020F0502020204030204" pitchFamily="34" charset="0"/>
+              <a:cs typeface="Arial" panose="020B0604020202020204" pitchFamily="34" charset="0"/>
+            </a:endParaRPr>
+          </a:p>
+          <a:p>
+            <a:pPr algn="just">
+              <a:spcBef>
+                <a:spcPts val="400"/>
+              </a:spcBef>
+              <a:spcAft>
+                <a:spcPts val="400"/>
+              </a:spcAft>
+            </a:pPr>
+            <a:endParaRPr lang="fr-FR" sz="1200" dirty="0">
+              <a:ea typeface="Calibri" panose="020F0502020204030204" pitchFamily="34" charset="0"/>
+              <a:cs typeface="Arial" panose="020B0604020202020204" pitchFamily="34" charset="0"/>
+            </a:endParaRPr>
+          </a:p>
+          <a:p>
+            <a:pPr algn="just">
+              <a:spcBef>
+                <a:spcPts val="400"/>
+              </a:spcBef>
+              <a:spcAft>
+                <a:spcPts val="400"/>
+              </a:spcAft>
+            </a:pPr>
+            <a:endParaRPr lang="fr-FR" sz="1200" dirty="0">
+              <a:ea typeface="Calibri" panose="020F0502020204030204" pitchFamily="34" charset="0"/>
+              <a:cs typeface="Arial" panose="020B0604020202020204" pitchFamily="34" charset="0"/>
+            </a:endParaRPr>
+          </a:p>
+          <a:p>
+            <a:pPr algn="just">
+              <a:spcBef>
+                <a:spcPts val="400"/>
+              </a:spcBef>
+              <a:spcAft>
+                <a:spcPts val="400"/>
+              </a:spcAft>
+            </a:pPr>
+            <a:r>
+              <a:rPr lang="fr-FR" sz="1200" dirty="0">
+                <a:ea typeface="Calibri" panose="020F0502020204030204" pitchFamily="34" charset="0"/>
+                <a:cs typeface="Arial" panose="020B0604020202020204" pitchFamily="34" charset="0"/>
+              </a:rPr>
+              <a:t>Le modèle est dans /home/</a:t>
+            </a:r>
+            <a:r>
+              <a:rPr lang="fr-FR" sz="1200" dirty="0" err="1">
+                <a:ea typeface="Calibri" panose="020F0502020204030204" pitchFamily="34" charset="0"/>
+                <a:cs typeface="Arial" panose="020B0604020202020204" pitchFamily="34" charset="0"/>
+              </a:rPr>
+              <a:t>spark</a:t>
+            </a:r>
+            <a:r>
+              <a:rPr lang="fr-FR" sz="1200" dirty="0">
+                <a:ea typeface="Calibri" panose="020F0502020204030204" pitchFamily="34" charset="0"/>
+                <a:cs typeface="Arial" panose="020B0604020202020204" pitchFamily="34" charset="0"/>
+              </a:rPr>
+              <a:t>/</a:t>
+            </a:r>
+            <a:r>
+              <a:rPr lang="fr-FR" sz="1200" dirty="0" err="1">
+                <a:ea typeface="Calibri" panose="020F0502020204030204" pitchFamily="34" charset="0"/>
+                <a:cs typeface="Arial" panose="020B0604020202020204" pitchFamily="34" charset="0"/>
+              </a:rPr>
+              <a:t>modeles</a:t>
+            </a:r>
+            <a:r>
+              <a:rPr lang="fr-FR" sz="1200" dirty="0">
+                <a:ea typeface="Calibri" panose="020F0502020204030204" pitchFamily="34" charset="0"/>
+                <a:cs typeface="Arial" panose="020B0604020202020204" pitchFamily="34" charset="0"/>
+              </a:rPr>
+              <a:t> mais le partage est dans /data. </a:t>
+            </a:r>
+          </a:p>
+          <a:p>
+            <a:pPr algn="just">
+              <a:spcBef>
+                <a:spcPts val="400"/>
+              </a:spcBef>
+              <a:spcAft>
+                <a:spcPts val="400"/>
+              </a:spcAft>
+            </a:pPr>
+            <a:r>
+              <a:rPr lang="fr-FR" sz="1200" dirty="0">
+                <a:ea typeface="Calibri" panose="020F0502020204030204" pitchFamily="34" charset="0"/>
+                <a:cs typeface="Arial" panose="020B0604020202020204" pitchFamily="34" charset="0"/>
+              </a:rPr>
+              <a:t>Copier le modèle dans /data:</a:t>
+            </a:r>
+          </a:p>
+          <a:p>
+            <a:pPr algn="just">
+              <a:spcBef>
+                <a:spcPts val="400"/>
+              </a:spcBef>
+              <a:spcAft>
+                <a:spcPts val="400"/>
+              </a:spcAft>
+            </a:pPr>
+            <a:endParaRPr lang="fr-FR" sz="1200" dirty="0">
+              <a:ea typeface="Calibri" panose="020F0502020204030204" pitchFamily="34" charset="0"/>
+              <a:cs typeface="Arial" panose="020B0604020202020204" pitchFamily="34" charset="0"/>
+            </a:endParaRPr>
+          </a:p>
+          <a:p>
+            <a:pPr algn="just">
+              <a:spcBef>
+                <a:spcPts val="400"/>
+              </a:spcBef>
+              <a:spcAft>
+                <a:spcPts val="400"/>
+              </a:spcAft>
+            </a:pPr>
+            <a:endParaRPr lang="fr-FR" sz="1200" dirty="0">
+              <a:ea typeface="Calibri" panose="020F0502020204030204" pitchFamily="34" charset="0"/>
+              <a:cs typeface="Arial" panose="020B0604020202020204" pitchFamily="34" charset="0"/>
+            </a:endParaRPr>
+          </a:p>
+          <a:p>
+            <a:pPr algn="just">
+              <a:spcBef>
+                <a:spcPts val="400"/>
+              </a:spcBef>
+              <a:spcAft>
+                <a:spcPts val="400"/>
+              </a:spcAft>
+            </a:pPr>
+            <a:endParaRPr lang="fr-FR" sz="1200" dirty="0">
+              <a:ea typeface="Calibri" panose="020F0502020204030204" pitchFamily="34" charset="0"/>
+              <a:cs typeface="Arial" panose="020B0604020202020204" pitchFamily="34" charset="0"/>
+            </a:endParaRPr>
+          </a:p>
+          <a:p>
+            <a:pPr algn="just">
+              <a:spcBef>
+                <a:spcPts val="400"/>
+              </a:spcBef>
+              <a:spcAft>
+                <a:spcPts val="400"/>
+              </a:spcAft>
+            </a:pPr>
+            <a:r>
+              <a:rPr lang="fr-FR" sz="1200" dirty="0">
+                <a:ea typeface="Calibri" panose="020F0502020204030204" pitchFamily="34" charset="0"/>
+                <a:cs typeface="Arial" panose="020B0604020202020204" pitchFamily="34" charset="0"/>
+              </a:rPr>
+              <a:t>Quitter </a:t>
+            </a:r>
+            <a:r>
+              <a:rPr lang="fr-FR" sz="1200" dirty="0" err="1">
+                <a:ea typeface="Calibri" panose="020F0502020204030204" pitchFamily="34" charset="0"/>
+                <a:cs typeface="Arial" panose="020B0604020202020204" pitchFamily="34" charset="0"/>
+              </a:rPr>
+              <a:t>jupyter</a:t>
+            </a:r>
+            <a:endParaRPr lang="fr-FR" sz="1200" dirty="0">
+              <a:ea typeface="Calibri" panose="020F0502020204030204" pitchFamily="34" charset="0"/>
+              <a:cs typeface="Arial" panose="020B0604020202020204" pitchFamily="34" charset="0"/>
+            </a:endParaRPr>
+          </a:p>
+        </p:txBody>
+      </p:sp>
+      <p:sp>
+        <p:nvSpPr>
+          <p:cNvPr id="46" name="Google Shape;230;p17">
+            <a:extLst>
+              <a:ext uri="{FF2B5EF4-FFF2-40B4-BE49-F238E27FC236}">
+                <a16:creationId xmlns:a16="http://schemas.microsoft.com/office/drawing/2014/main" id="{164247A8-2FC9-2987-3B44-62DC265AB6C9}"/>
+              </a:ext>
+            </a:extLst>
+          </p:cNvPr>
+          <p:cNvSpPr/>
+          <p:nvPr/>
+        </p:nvSpPr>
+        <p:spPr>
+          <a:xfrm>
+            <a:off x="728524" y="58794"/>
+            <a:ext cx="7865349" cy="952920"/>
+          </a:xfrm>
+          <a:custGeom>
+            <a:avLst/>
+            <a:gdLst/>
+            <a:ahLst/>
+            <a:cxnLst/>
+            <a:rect l="l" t="t" r="r" b="b"/>
+            <a:pathLst>
+              <a:path w="12451" h="8780" extrusionOk="0">
+                <a:moveTo>
+                  <a:pt x="0" y="0"/>
+                </a:moveTo>
+                <a:lnTo>
+                  <a:pt x="0" y="8780"/>
+                </a:lnTo>
+                <a:lnTo>
+                  <a:pt x="12101" y="8780"/>
+                </a:lnTo>
+                <a:cubicBezTo>
+                  <a:pt x="12289" y="8780"/>
+                  <a:pt x="12451" y="8618"/>
+                  <a:pt x="12451" y="8428"/>
+                </a:cubicBezTo>
+                <a:lnTo>
+                  <a:pt x="12451" y="378"/>
+                </a:lnTo>
+                <a:cubicBezTo>
+                  <a:pt x="12451" y="162"/>
+                  <a:pt x="12289" y="0"/>
+                  <a:pt x="12101" y="0"/>
+                </a:cubicBezTo>
+                <a:close/>
+              </a:path>
+            </a:pathLst>
+          </a:custGeom>
+          <a:solidFill>
+            <a:srgbClr val="E89D06"/>
+          </a:solidFill>
+          <a:ln>
+            <a:noFill/>
+          </a:ln>
+          <a:effectLst>
+            <a:outerShdw blurRad="85725" dist="57150" dir="1200000" algn="bl" rotWithShape="0">
+              <a:srgbClr val="000000">
+                <a:alpha val="20000"/>
+              </a:srgbClr>
+            </a:outerShdw>
+          </a:effectLst>
+        </p:spPr>
+        <p:txBody>
+          <a:bodyPr spcFirstLastPara="1" wrap="square" lIns="91425" tIns="91425" rIns="91425" bIns="91425" anchor="ctr" anchorCtr="0">
+            <a:noAutofit/>
+          </a:bodyPr>
+          <a:lstStyle/>
+          <a:p>
+            <a:pPr marL="0" lvl="0" indent="0" algn="l" rtl="0">
+              <a:spcBef>
+                <a:spcPts val="0"/>
+              </a:spcBef>
+              <a:spcAft>
+                <a:spcPts val="0"/>
+              </a:spcAft>
+              <a:buNone/>
+            </a:pPr>
+            <a:endParaRPr/>
+          </a:p>
+        </p:txBody>
+      </p:sp>
+      <p:sp>
+        <p:nvSpPr>
+          <p:cNvPr id="47" name="Google Shape;231;p17">
+            <a:extLst>
+              <a:ext uri="{FF2B5EF4-FFF2-40B4-BE49-F238E27FC236}">
+                <a16:creationId xmlns:a16="http://schemas.microsoft.com/office/drawing/2014/main" id="{D8DB98CE-3555-D351-72B7-6023647BBD06}"/>
+              </a:ext>
+            </a:extLst>
+          </p:cNvPr>
+          <p:cNvSpPr/>
+          <p:nvPr/>
+        </p:nvSpPr>
+        <p:spPr>
+          <a:xfrm>
+            <a:off x="253089" y="58794"/>
+            <a:ext cx="530346" cy="952920"/>
+          </a:xfrm>
+          <a:custGeom>
+            <a:avLst/>
+            <a:gdLst/>
+            <a:ahLst/>
+            <a:cxnLst/>
+            <a:rect l="l" t="t" r="r" b="b"/>
+            <a:pathLst>
+              <a:path w="3325" h="6646" extrusionOk="0">
+                <a:moveTo>
+                  <a:pt x="3324" y="1"/>
+                </a:moveTo>
+                <a:cubicBezTo>
+                  <a:pt x="1488" y="1"/>
+                  <a:pt x="1" y="1487"/>
+                  <a:pt x="1" y="3324"/>
+                </a:cubicBezTo>
+                <a:cubicBezTo>
+                  <a:pt x="1" y="5161"/>
+                  <a:pt x="1488" y="6645"/>
+                  <a:pt x="3324" y="6645"/>
+                </a:cubicBezTo>
+                <a:lnTo>
+                  <a:pt x="3324" y="1"/>
+                </a:lnTo>
+                <a:close/>
+              </a:path>
+            </a:pathLst>
+          </a:custGeom>
+          <a:solidFill>
+            <a:srgbClr val="E89D06"/>
+          </a:solidFill>
+          <a:ln>
+            <a:noFill/>
+          </a:ln>
+          <a:effectLst>
+            <a:outerShdw blurRad="71438" dist="57150" dir="1140000" algn="bl" rotWithShape="0">
+              <a:schemeClr val="dk1">
+                <a:alpha val="20000"/>
+              </a:schemeClr>
+            </a:outerShdw>
+          </a:effectLst>
+        </p:spPr>
+        <p:txBody>
+          <a:bodyPr spcFirstLastPara="1" wrap="square" lIns="91425" tIns="91425" rIns="91425" bIns="91425" anchor="ctr" anchorCtr="0">
+            <a:noAutofit/>
+          </a:bodyPr>
+          <a:lstStyle/>
+          <a:p>
+            <a:pPr marL="0" lvl="0" indent="0" algn="l" rtl="0">
+              <a:spcBef>
+                <a:spcPts val="0"/>
+              </a:spcBef>
+              <a:spcAft>
+                <a:spcPts val="0"/>
+              </a:spcAft>
+              <a:buNone/>
+            </a:pPr>
+            <a:endParaRPr/>
+          </a:p>
+        </p:txBody>
+      </p:sp>
+      <p:sp>
+        <p:nvSpPr>
+          <p:cNvPr id="48" name="Google Shape;232;p17">
+            <a:extLst>
+              <a:ext uri="{FF2B5EF4-FFF2-40B4-BE49-F238E27FC236}">
+                <a16:creationId xmlns:a16="http://schemas.microsoft.com/office/drawing/2014/main" id="{AF758018-AC3F-39CE-C7FF-B5B12C94ECBB}"/>
+              </a:ext>
+            </a:extLst>
+          </p:cNvPr>
+          <p:cNvSpPr txBox="1"/>
+          <p:nvPr/>
+        </p:nvSpPr>
+        <p:spPr>
+          <a:xfrm>
+            <a:off x="398524" y="346314"/>
+            <a:ext cx="330000" cy="387300"/>
+          </a:xfrm>
+          <a:prstGeom prst="rect">
+            <a:avLst/>
+          </a:prstGeom>
+          <a:solidFill>
+            <a:srgbClr val="E89D06"/>
+          </a:solidFill>
+          <a:ln>
+            <a:noFill/>
+          </a:ln>
+        </p:spPr>
+        <p:txBody>
+          <a:bodyPr spcFirstLastPara="1" wrap="square" lIns="91425" tIns="91425" rIns="91425" bIns="91425" anchor="ctr" anchorCtr="0">
+            <a:noAutofit/>
+          </a:bodyPr>
+          <a:lstStyle/>
+          <a:p>
+            <a:pPr marL="0" lvl="0" indent="0" algn="l" rtl="0">
+              <a:lnSpc>
+                <a:spcPct val="100000"/>
+              </a:lnSpc>
+              <a:spcBef>
+                <a:spcPts val="0"/>
+              </a:spcBef>
+              <a:spcAft>
+                <a:spcPts val="0"/>
+              </a:spcAft>
+              <a:buNone/>
+            </a:pPr>
+            <a:r>
+              <a:rPr lang="en" sz="2000" b="1">
+                <a:solidFill>
+                  <a:schemeClr val="lt1"/>
+                </a:solidFill>
+                <a:latin typeface="Roboto"/>
+                <a:ea typeface="Roboto"/>
+                <a:cs typeface="Roboto"/>
+                <a:sym typeface="Roboto"/>
+              </a:rPr>
+              <a:t>+</a:t>
+            </a:r>
+            <a:endParaRPr sz="2000" b="1">
+              <a:solidFill>
+                <a:schemeClr val="lt1"/>
+              </a:solidFill>
+              <a:latin typeface="Roboto"/>
+              <a:ea typeface="Roboto"/>
+              <a:cs typeface="Roboto"/>
+              <a:sym typeface="Roboto"/>
+            </a:endParaRPr>
+          </a:p>
+        </p:txBody>
+      </p:sp>
+      <mc:AlternateContent xmlns:mc="http://schemas.openxmlformats.org/markup-compatibility/2006" xmlns:p14="http://schemas.microsoft.com/office/powerpoint/2010/main">
+        <mc:Choice Requires="p14">
+          <p:contentPart p14:bwMode="auto" r:id="rId2">
+            <p14:nvContentPartPr>
+              <p14:cNvPr id="5" name="Encre 4">
+                <a:extLst>
+                  <a:ext uri="{FF2B5EF4-FFF2-40B4-BE49-F238E27FC236}">
+                    <a16:creationId xmlns:a16="http://schemas.microsoft.com/office/drawing/2014/main" id="{38668798-632C-A9AD-4EA8-87F22E7F7B88}"/>
+                  </a:ext>
+                </a:extLst>
+              </p14:cNvPr>
+              <p14:cNvContentPartPr/>
+              <p14:nvPr/>
+            </p14:nvContentPartPr>
+            <p14:xfrm>
+              <a:off x="698625" y="3835762"/>
+              <a:ext cx="360" cy="360"/>
+            </p14:xfrm>
+          </p:contentPart>
+        </mc:Choice>
+        <mc:Fallback xmlns="">
+          <p:pic>
+            <p:nvPicPr>
+              <p:cNvPr id="5" name="Encre 4">
+                <a:extLst>
+                  <a:ext uri="{FF2B5EF4-FFF2-40B4-BE49-F238E27FC236}">
+                    <a16:creationId xmlns:a16="http://schemas.microsoft.com/office/drawing/2014/main" id="{38668798-632C-A9AD-4EA8-87F22E7F7B88}"/>
+                  </a:ext>
+                </a:extLst>
+              </p:cNvPr>
+              <p:cNvPicPr/>
+              <p:nvPr/>
+            </p:nvPicPr>
+            <p:blipFill>
+              <a:blip r:embed="rId3"/>
+              <a:stretch>
+                <a:fillRect/>
+              </a:stretch>
+            </p:blipFill>
+            <p:spPr>
+              <a:xfrm>
+                <a:off x="692505" y="3829642"/>
+                <a:ext cx="12600" cy="12600"/>
+              </a:xfrm>
+              <a:prstGeom prst="rect">
+                <a:avLst/>
+              </a:prstGeom>
+            </p:spPr>
+          </p:pic>
+        </mc:Fallback>
+      </mc:AlternateContent>
+      <p:sp>
+        <p:nvSpPr>
+          <p:cNvPr id="45" name="ZoneTexte 44">
+            <a:extLst>
+              <a:ext uri="{FF2B5EF4-FFF2-40B4-BE49-F238E27FC236}">
+                <a16:creationId xmlns:a16="http://schemas.microsoft.com/office/drawing/2014/main" id="{F9C22BF0-6CD1-E0BF-6C11-522BD64765F1}"/>
+              </a:ext>
+            </a:extLst>
+          </p:cNvPr>
+          <p:cNvSpPr txBox="1"/>
+          <p:nvPr/>
+        </p:nvSpPr>
+        <p:spPr>
+          <a:xfrm>
+            <a:off x="824975" y="311564"/>
+            <a:ext cx="7330283" cy="453970"/>
+          </a:xfrm>
+          <a:prstGeom prst="rect">
+            <a:avLst/>
+          </a:prstGeom>
+          <a:noFill/>
+        </p:spPr>
+        <p:txBody>
+          <a:bodyPr wrap="square" lIns="68580" tIns="34290" rIns="68580" bIns="34290" rtlCol="0" anchor="t">
+            <a:spAutoFit/>
+          </a:bodyPr>
+          <a:lstStyle/>
+          <a:p>
+            <a:r>
+              <a:rPr lang="fr-FR" sz="2500" b="1" dirty="0">
+                <a:solidFill>
+                  <a:schemeClr val="bg1"/>
+                </a:solidFill>
+                <a:latin typeface="+mj-lt"/>
+              </a:rPr>
+              <a:t>Etapes pour réaliser l’ Analyse d’image</a:t>
+            </a:r>
+          </a:p>
+        </p:txBody>
+      </p:sp>
+      <p:sp>
+        <p:nvSpPr>
+          <p:cNvPr id="3" name="Rectangle 2">
+            <a:extLst>
+              <a:ext uri="{FF2B5EF4-FFF2-40B4-BE49-F238E27FC236}">
+                <a16:creationId xmlns:a16="http://schemas.microsoft.com/office/drawing/2014/main" id="{76083C82-1931-4D14-F898-68AA1D05C1D1}"/>
+              </a:ext>
+            </a:extLst>
+          </p:cNvPr>
+          <p:cNvSpPr/>
+          <p:nvPr/>
+        </p:nvSpPr>
+        <p:spPr>
+          <a:xfrm>
+            <a:off x="936927" y="1965202"/>
+            <a:ext cx="7270146" cy="323820"/>
+          </a:xfrm>
+          <a:prstGeom prst="rect">
+            <a:avLst/>
+          </a:prstGeom>
+        </p:spPr>
+        <p:style>
+          <a:lnRef idx="2">
+            <a:schemeClr val="dk1">
+              <a:shade val="15000"/>
+            </a:schemeClr>
+          </a:lnRef>
+          <a:fillRef idx="1">
+            <a:schemeClr val="dk1"/>
+          </a:fillRef>
+          <a:effectRef idx="0">
+            <a:schemeClr val="dk1"/>
+          </a:effectRef>
+          <a:fontRef idx="minor">
+            <a:schemeClr val="lt1"/>
+          </a:fontRef>
+        </p:style>
+        <p:txBody>
+          <a:bodyPr rtlCol="0" anchor="ctr"/>
+          <a:lstStyle/>
+          <a:p>
+            <a:pPr>
+              <a:lnSpc>
+                <a:spcPts val="1425"/>
+              </a:lnSpc>
+            </a:pPr>
+            <a:r>
+              <a:rPr lang="fr-FR" sz="1000" i="1" dirty="0">
+                <a:solidFill>
+                  <a:schemeClr val="bg1"/>
+                </a:solidFill>
+                <a:latin typeface="+mj-lt"/>
+              </a:rPr>
+              <a:t>docker </a:t>
+            </a:r>
+            <a:r>
+              <a:rPr lang="fr-FR" sz="1000" i="1" dirty="0" err="1">
+                <a:solidFill>
+                  <a:schemeClr val="bg1"/>
+                </a:solidFill>
+                <a:latin typeface="+mj-lt"/>
+              </a:rPr>
+              <a:t>exec</a:t>
+            </a:r>
+            <a:r>
+              <a:rPr lang="fr-FR" sz="1000" i="1" dirty="0">
+                <a:solidFill>
+                  <a:schemeClr val="bg1"/>
+                </a:solidFill>
+                <a:latin typeface="+mj-lt"/>
+              </a:rPr>
+              <a:t> –</a:t>
+            </a:r>
+            <a:r>
+              <a:rPr lang="fr-FR" sz="1000" i="1" dirty="0" err="1">
+                <a:solidFill>
+                  <a:schemeClr val="bg1"/>
+                </a:solidFill>
+                <a:latin typeface="+mj-lt"/>
+              </a:rPr>
+              <a:t>it</a:t>
+            </a:r>
+            <a:r>
+              <a:rPr lang="fr-FR" sz="1000" i="1" dirty="0">
+                <a:solidFill>
+                  <a:schemeClr val="bg1"/>
+                </a:solidFill>
+                <a:latin typeface="+mj-lt"/>
+              </a:rPr>
+              <a:t> </a:t>
+            </a:r>
+            <a:r>
+              <a:rPr lang="fr-FR" sz="1000" i="1" dirty="0" err="1">
+                <a:solidFill>
+                  <a:schemeClr val="bg1"/>
+                </a:solidFill>
+                <a:latin typeface="+mj-lt"/>
+              </a:rPr>
+              <a:t>jupyter</a:t>
+            </a:r>
+            <a:r>
+              <a:rPr lang="fr-FR" sz="1000" i="1" dirty="0">
+                <a:solidFill>
+                  <a:schemeClr val="bg1"/>
+                </a:solidFill>
+                <a:latin typeface="+mj-lt"/>
+              </a:rPr>
+              <a:t> </a:t>
+            </a:r>
+            <a:r>
+              <a:rPr lang="fr-FR" sz="1000" i="1" dirty="0" err="1">
+                <a:solidFill>
+                  <a:schemeClr val="bg1"/>
+                </a:solidFill>
+                <a:latin typeface="+mj-lt"/>
+              </a:rPr>
+              <a:t>bash</a:t>
+            </a:r>
+            <a:endParaRPr lang="en-US" sz="1000" b="0" i="1" dirty="0">
+              <a:solidFill>
+                <a:schemeClr val="bg1"/>
+              </a:solidFill>
+              <a:effectLst/>
+              <a:latin typeface="+mj-lt"/>
+            </a:endParaRPr>
+          </a:p>
+        </p:txBody>
+      </p:sp>
+      <p:sp>
+        <p:nvSpPr>
+          <p:cNvPr id="2" name="Rectangle 1">
+            <a:extLst>
+              <a:ext uri="{FF2B5EF4-FFF2-40B4-BE49-F238E27FC236}">
+                <a16:creationId xmlns:a16="http://schemas.microsoft.com/office/drawing/2014/main" id="{0ECCAFB0-A81B-6F48-FCBC-E657FC782DBB}"/>
+              </a:ext>
+            </a:extLst>
+          </p:cNvPr>
+          <p:cNvSpPr/>
+          <p:nvPr/>
+        </p:nvSpPr>
+        <p:spPr>
+          <a:xfrm>
+            <a:off x="855043" y="3114815"/>
+            <a:ext cx="7270146" cy="611256"/>
+          </a:xfrm>
+          <a:prstGeom prst="rect">
+            <a:avLst/>
+          </a:prstGeom>
+        </p:spPr>
+        <p:style>
+          <a:lnRef idx="2">
+            <a:schemeClr val="dk1">
+              <a:shade val="15000"/>
+            </a:schemeClr>
+          </a:lnRef>
+          <a:fillRef idx="1">
+            <a:schemeClr val="dk1"/>
+          </a:fillRef>
+          <a:effectRef idx="0">
+            <a:schemeClr val="dk1"/>
+          </a:effectRef>
+          <a:fontRef idx="minor">
+            <a:schemeClr val="lt1"/>
+          </a:fontRef>
+        </p:style>
+        <p:txBody>
+          <a:bodyPr rtlCol="0" anchor="ctr"/>
+          <a:lstStyle/>
+          <a:p>
+            <a:pPr>
+              <a:lnSpc>
+                <a:spcPts val="1425"/>
+              </a:lnSpc>
+            </a:pPr>
+            <a:r>
+              <a:rPr lang="fr-FR" sz="1000" i="1" dirty="0" err="1">
+                <a:solidFill>
+                  <a:schemeClr val="bg1"/>
+                </a:solidFill>
+                <a:latin typeface="+mj-lt"/>
+              </a:rPr>
+              <a:t>c</a:t>
+            </a:r>
+            <a:r>
+              <a:rPr lang="fr-FR" sz="1000" b="0" i="1" dirty="0" err="1">
+                <a:solidFill>
+                  <a:schemeClr val="bg1"/>
+                </a:solidFill>
+                <a:effectLst/>
+                <a:latin typeface="+mj-lt"/>
+              </a:rPr>
+              <a:t>p</a:t>
+            </a:r>
+            <a:r>
+              <a:rPr lang="fr-FR" sz="1000" b="0" i="1" dirty="0">
+                <a:solidFill>
+                  <a:schemeClr val="bg1"/>
+                </a:solidFill>
+                <a:effectLst/>
+                <a:latin typeface="+mj-lt"/>
+              </a:rPr>
+              <a:t> –R </a:t>
+            </a:r>
+            <a:r>
+              <a:rPr lang="fr-FR" sz="1000" dirty="0">
+                <a:ea typeface="Calibri" panose="020F0502020204030204" pitchFamily="34" charset="0"/>
+                <a:cs typeface="Arial" panose="020B0604020202020204" pitchFamily="34" charset="0"/>
+              </a:rPr>
+              <a:t>/home/</a:t>
+            </a:r>
+            <a:r>
+              <a:rPr lang="fr-FR" sz="1000" dirty="0" err="1">
+                <a:ea typeface="Calibri" panose="020F0502020204030204" pitchFamily="34" charset="0"/>
+                <a:cs typeface="Arial" panose="020B0604020202020204" pitchFamily="34" charset="0"/>
+              </a:rPr>
+              <a:t>spark</a:t>
+            </a:r>
+            <a:r>
+              <a:rPr lang="fr-FR" sz="1000" dirty="0">
+                <a:ea typeface="Calibri" panose="020F0502020204030204" pitchFamily="34" charset="0"/>
+                <a:cs typeface="Arial" panose="020B0604020202020204" pitchFamily="34" charset="0"/>
+              </a:rPr>
+              <a:t>/</a:t>
+            </a:r>
+            <a:r>
+              <a:rPr lang="fr-FR" sz="1000" dirty="0" err="1">
+                <a:ea typeface="Calibri" panose="020F0502020204030204" pitchFamily="34" charset="0"/>
+                <a:cs typeface="Arial" panose="020B0604020202020204" pitchFamily="34" charset="0"/>
+              </a:rPr>
+              <a:t>modeles</a:t>
+            </a:r>
+            <a:r>
+              <a:rPr lang="fr-FR" sz="1000" dirty="0">
+                <a:ea typeface="Calibri" panose="020F0502020204030204" pitchFamily="34" charset="0"/>
+                <a:cs typeface="Arial" panose="020B0604020202020204" pitchFamily="34" charset="0"/>
+              </a:rPr>
+              <a:t> /data/.</a:t>
+            </a:r>
+            <a:r>
+              <a:rPr lang="fr-FR" sz="1000" b="0" i="1" dirty="0">
+                <a:solidFill>
+                  <a:schemeClr val="bg1"/>
+                </a:solidFill>
+                <a:effectLst/>
+                <a:latin typeface="+mj-lt"/>
+              </a:rPr>
+              <a:t> </a:t>
+            </a:r>
+            <a:endParaRPr lang="en-US" sz="1000" b="0" i="1" dirty="0">
+              <a:solidFill>
+                <a:schemeClr val="bg1"/>
+              </a:solidFill>
+              <a:effectLst/>
+              <a:latin typeface="+mj-lt"/>
+            </a:endParaRPr>
+          </a:p>
+        </p:txBody>
+      </p:sp>
+      <p:sp>
+        <p:nvSpPr>
+          <p:cNvPr id="6" name="Rectangle 5">
+            <a:extLst>
+              <a:ext uri="{FF2B5EF4-FFF2-40B4-BE49-F238E27FC236}">
+                <a16:creationId xmlns:a16="http://schemas.microsoft.com/office/drawing/2014/main" id="{96C73D3E-2FF1-AA30-2AD5-81E389A7F96B}"/>
+              </a:ext>
+            </a:extLst>
+          </p:cNvPr>
+          <p:cNvSpPr/>
+          <p:nvPr/>
+        </p:nvSpPr>
+        <p:spPr>
+          <a:xfrm>
+            <a:off x="824975" y="4246236"/>
+            <a:ext cx="7270146" cy="611256"/>
+          </a:xfrm>
+          <a:prstGeom prst="rect">
+            <a:avLst/>
+          </a:prstGeom>
+        </p:spPr>
+        <p:style>
+          <a:lnRef idx="2">
+            <a:schemeClr val="dk1">
+              <a:shade val="15000"/>
+            </a:schemeClr>
+          </a:lnRef>
+          <a:fillRef idx="1">
+            <a:schemeClr val="dk1"/>
+          </a:fillRef>
+          <a:effectRef idx="0">
+            <a:schemeClr val="dk1"/>
+          </a:effectRef>
+          <a:fontRef idx="minor">
+            <a:schemeClr val="lt1"/>
+          </a:fontRef>
+        </p:style>
+        <p:txBody>
+          <a:bodyPr rtlCol="0" anchor="ctr"/>
+          <a:lstStyle/>
+          <a:p>
+            <a:pPr>
+              <a:lnSpc>
+                <a:spcPts val="1425"/>
+              </a:lnSpc>
+            </a:pPr>
+            <a:r>
+              <a:rPr lang="fr-FR" sz="1000" i="1" dirty="0">
+                <a:solidFill>
+                  <a:schemeClr val="bg1"/>
+                </a:solidFill>
+                <a:latin typeface="+mj-lt"/>
+              </a:rPr>
+              <a:t>exit</a:t>
+            </a:r>
+            <a:endParaRPr lang="en-US" sz="1000" b="0" i="1" dirty="0">
+              <a:solidFill>
+                <a:schemeClr val="bg1"/>
+              </a:solidFill>
+              <a:effectLst/>
+              <a:latin typeface="+mj-lt"/>
+            </a:endParaRPr>
+          </a:p>
+        </p:txBody>
+      </p:sp>
+    </p:spTree>
+    <p:extLst>
+      <p:ext uri="{BB962C8B-B14F-4D97-AF65-F5344CB8AC3E}">
+        <p14:creationId xmlns:p14="http://schemas.microsoft.com/office/powerpoint/2010/main" val="3966493580"/>
       </p:ext>
     </p:extLst>
   </p:cSld>
@@ -31668,7 +31697,7 @@
         <p:cNvPr id="1" name="">
           <a:extLst>
             <a:ext uri="{FF2B5EF4-FFF2-40B4-BE49-F238E27FC236}">
-              <a16:creationId xmlns:a16="http://schemas.microsoft.com/office/drawing/2014/main" id="{E1F9B66C-45E1-27A5-B671-7B3C9717056E}"/>
+              <a16:creationId xmlns:a16="http://schemas.microsoft.com/office/drawing/2014/main" id="{C111E740-AA99-BB91-C315-F54B875BF8D9}"/>
             </a:ext>
           </a:extLst>
         </p:cNvPr>
@@ -31688,7 +31717,7 @@
           <p:cNvPr id="40" name="ZoneTexte 39">
             <a:extLst>
               <a:ext uri="{FF2B5EF4-FFF2-40B4-BE49-F238E27FC236}">
-                <a16:creationId xmlns:a16="http://schemas.microsoft.com/office/drawing/2014/main" id="{DF76492F-E52B-17A9-82BB-16B00C06EB9D}"/>
+                <a16:creationId xmlns:a16="http://schemas.microsoft.com/office/drawing/2014/main" id="{DF7B41C9-5758-8F53-86DF-595D5C175E7C}"/>
               </a:ext>
             </a:extLst>
           </p:cNvPr>
@@ -31698,7 +31727,7 @@
         <p:spPr>
           <a:xfrm>
             <a:off x="365918" y="1041315"/>
-            <a:ext cx="8146180" cy="3621504"/>
+            <a:ext cx="8146180" cy="3334246"/>
           </a:xfrm>
           <a:prstGeom prst="rect">
             <a:avLst/>
@@ -31901,21 +31930,7 @@
                 <a:ea typeface="Calibri" panose="020F0502020204030204" pitchFamily="34" charset="0"/>
                 <a:cs typeface="Arial" panose="020B0604020202020204" pitchFamily="34" charset="0"/>
               </a:rPr>
-              <a:t>Il suffit ensuite pour pouvoir les utiliser dans le container de les copier dans un répertoire accessible par l’utilisateur </a:t>
-            </a:r>
-            <a:r>
-              <a:rPr lang="fr-FR" sz="1200" dirty="0" err="1">
-                <a:ea typeface="Calibri" panose="020F0502020204030204" pitchFamily="34" charset="0"/>
-                <a:cs typeface="Arial" panose="020B0604020202020204" pitchFamily="34" charset="0"/>
-              </a:rPr>
-              <a:t>spark</a:t>
-            </a:r>
-            <a:r>
-              <a:rPr lang="fr-FR" sz="1200" dirty="0">
-                <a:ea typeface="Calibri" panose="020F0502020204030204" pitchFamily="34" charset="0"/>
-                <a:cs typeface="Arial" panose="020B0604020202020204" pitchFamily="34" charset="0"/>
-              </a:rPr>
-              <a:t> par exemple /</a:t>
+              <a:t>Il suffit ensuite pour pouvoir les utiliser dans le container de les copier dans un répertoire accessible par l’utilisateur root par exemple /</a:t>
             </a:r>
             <a:r>
               <a:rPr lang="fr-FR" sz="1200" dirty="0" err="1">
@@ -31969,69 +31984,10 @@
                 <a:spcPts val="400"/>
               </a:spcAft>
             </a:pPr>
-            <a:r>
-              <a:rPr lang="fr-FR" sz="1200" dirty="0">
-                <a:ea typeface="Calibri" panose="020F0502020204030204" pitchFamily="34" charset="0"/>
-                <a:cs typeface="Arial" panose="020B0604020202020204" pitchFamily="34" charset="0"/>
-              </a:rPr>
-              <a:t>Comme </a:t>
-            </a:r>
-            <a:r>
-              <a:rPr lang="fr-FR" sz="1200" dirty="0" err="1">
-                <a:ea typeface="Calibri" panose="020F0502020204030204" pitchFamily="34" charset="0"/>
-                <a:cs typeface="Arial" panose="020B0604020202020204" pitchFamily="34" charset="0"/>
-              </a:rPr>
-              <a:t>spark</a:t>
-            </a:r>
-            <a:r>
-              <a:rPr lang="fr-FR" sz="1200" dirty="0">
-                <a:ea typeface="Calibri" panose="020F0502020204030204" pitchFamily="34" charset="0"/>
-                <a:cs typeface="Arial" panose="020B0604020202020204" pitchFamily="34" charset="0"/>
-              </a:rPr>
-              <a:t> est installé pour root, il faut installer les </a:t>
-            </a:r>
-            <a:r>
-              <a:rPr lang="fr-FR" sz="1200" dirty="0" err="1">
-                <a:ea typeface="Calibri" panose="020F0502020204030204" pitchFamily="34" charset="0"/>
-                <a:cs typeface="Arial" panose="020B0604020202020204" pitchFamily="34" charset="0"/>
-              </a:rPr>
-              <a:t>libraries</a:t>
-            </a:r>
-            <a:r>
-              <a:rPr lang="fr-FR" sz="1200" dirty="0">
-                <a:ea typeface="Calibri" panose="020F0502020204030204" pitchFamily="34" charset="0"/>
-                <a:cs typeface="Arial" panose="020B0604020202020204" pitchFamily="34" charset="0"/>
-              </a:rPr>
-              <a:t> pour </a:t>
-            </a:r>
-            <a:r>
-              <a:rPr lang="fr-FR" sz="1200" dirty="0" err="1">
-                <a:ea typeface="Calibri" panose="020F0502020204030204" pitchFamily="34" charset="0"/>
-                <a:cs typeface="Arial" panose="020B0604020202020204" pitchFamily="34" charset="0"/>
-              </a:rPr>
-              <a:t>spark</a:t>
-            </a:r>
-            <a:r>
-              <a:rPr lang="fr-FR" sz="1200" dirty="0">
-                <a:ea typeface="Calibri" panose="020F0502020204030204" pitchFamily="34" charset="0"/>
-                <a:cs typeface="Arial" panose="020B0604020202020204" pitchFamily="34" charset="0"/>
-              </a:rPr>
-              <a:t> dans /</a:t>
-            </a:r>
-            <a:r>
-              <a:rPr lang="fr-FR" sz="1200" dirty="0" err="1">
-                <a:ea typeface="Calibri" panose="020F0502020204030204" pitchFamily="34" charset="0"/>
-                <a:cs typeface="Arial" panose="020B0604020202020204" pitchFamily="34" charset="0"/>
-              </a:rPr>
-              <a:t>tmp</a:t>
-            </a:r>
-            <a:r>
-              <a:rPr lang="fr-FR" sz="1200" dirty="0">
-                <a:ea typeface="Calibri" panose="020F0502020204030204" pitchFamily="34" charset="0"/>
-                <a:cs typeface="Arial" panose="020B0604020202020204" pitchFamily="34" charset="0"/>
-              </a:rPr>
-              <a:t>:</a:t>
-            </a:r>
+            <a:endParaRPr lang="fr-FR" sz="1200" dirty="0">
+              <a:ea typeface="Calibri" panose="020F0502020204030204" pitchFamily="34" charset="0"/>
+              <a:cs typeface="Arial" panose="020B0604020202020204" pitchFamily="34" charset="0"/>
+            </a:endParaRPr>
           </a:p>
           <a:p>
             <a:pPr algn="just">
@@ -32047,20 +32003,6 @@
               <a:cs typeface="Arial" panose="020B0604020202020204" pitchFamily="34" charset="0"/>
             </a:endParaRPr>
           </a:p>
-          <a:p>
-            <a:pPr algn="just">
-              <a:spcBef>
-                <a:spcPts val="400"/>
-              </a:spcBef>
-              <a:spcAft>
-                <a:spcPts val="400"/>
-              </a:spcAft>
-            </a:pPr>
-            <a:endParaRPr lang="fr-FR" sz="1200" dirty="0">
-              <a:ea typeface="Calibri" panose="020F0502020204030204" pitchFamily="34" charset="0"/>
-              <a:cs typeface="Arial" panose="020B0604020202020204" pitchFamily="34" charset="0"/>
-            </a:endParaRPr>
-          </a:p>
         </p:txBody>
       </p:sp>
       <p:sp>
@@ -32068,7 +32010,7 @@
           <p:cNvPr id="46" name="Google Shape;230;p17">
             <a:extLst>
               <a:ext uri="{FF2B5EF4-FFF2-40B4-BE49-F238E27FC236}">
-                <a16:creationId xmlns:a16="http://schemas.microsoft.com/office/drawing/2014/main" id="{164247A8-2FC9-2987-3B44-62DC265AB6C9}"/>
+                <a16:creationId xmlns:a16="http://schemas.microsoft.com/office/drawing/2014/main" id="{C474D65E-E74E-D251-EC92-DB9C4DEB5B3E}"/>
               </a:ext>
             </a:extLst>
           </p:cNvPr>
@@ -32152,7 +32094,7 @@
           <p:cNvPr id="47" name="Google Shape;231;p17">
             <a:extLst>
               <a:ext uri="{FF2B5EF4-FFF2-40B4-BE49-F238E27FC236}">
-                <a16:creationId xmlns:a16="http://schemas.microsoft.com/office/drawing/2014/main" id="{D8DB98CE-3555-D351-72B7-6023647BBD06}"/>
+                <a16:creationId xmlns:a16="http://schemas.microsoft.com/office/drawing/2014/main" id="{512A96D3-87DD-3017-7FB9-B96DAFEE512B}"/>
               </a:ext>
             </a:extLst>
           </p:cNvPr>
@@ -32230,7 +32172,7 @@
           <p:cNvPr id="48" name="Google Shape;232;p17">
             <a:extLst>
               <a:ext uri="{FF2B5EF4-FFF2-40B4-BE49-F238E27FC236}">
-                <a16:creationId xmlns:a16="http://schemas.microsoft.com/office/drawing/2014/main" id="{AF758018-AC3F-39CE-C7FF-B5B12C94ECBB}"/>
+                <a16:creationId xmlns:a16="http://schemas.microsoft.com/office/drawing/2014/main" id="{D78F6280-5918-320C-9CF0-061BB11F97C3}"/>
               </a:ext>
             </a:extLst>
           </p:cNvPr>
@@ -32294,14 +32236,14 @@
           </a:p>
         </p:txBody>
       </p:sp>
-      <mc:AlternateContent xmlns:mc="http://schemas.openxmlformats.org/markup-compatibility/2006">
-        <mc:Choice xmlns:p14="http://schemas.microsoft.com/office/powerpoint/2010/main" Requires="p14">
+      <mc:AlternateContent xmlns:mc="http://schemas.openxmlformats.org/markup-compatibility/2006" xmlns:p14="http://schemas.microsoft.com/office/powerpoint/2010/main">
+        <mc:Choice Requires="p14">
           <p:contentPart p14:bwMode="auto" r:id="rId2">
             <p14:nvContentPartPr>
               <p14:cNvPr id="5" name="Encre 4">
                 <a:extLst>
                   <a:ext uri="{FF2B5EF4-FFF2-40B4-BE49-F238E27FC236}">
-                    <a16:creationId xmlns:a16="http://schemas.microsoft.com/office/drawing/2014/main" id="{38668798-632C-A9AD-4EA8-87F22E7F7B88}"/>
+                    <a16:creationId xmlns:a16="http://schemas.microsoft.com/office/drawing/2014/main" id="{A54E3C13-F770-67E6-0CCB-B39BBB53C501}"/>
                   </a:ext>
                 </a:extLst>
               </p14:cNvPr>
@@ -32314,7 +32256,7 @@
             </p14:xfrm>
           </p:contentPart>
         </mc:Choice>
-        <mc:Fallback>
+        <mc:Fallback xmlns="">
           <p:pic>
             <p:nvPicPr>
               <p:cNvPr id="5" name="Encre 4">
@@ -32350,7 +32292,7 @@
           <p:cNvPr id="45" name="ZoneTexte 44">
             <a:extLst>
               <a:ext uri="{FF2B5EF4-FFF2-40B4-BE49-F238E27FC236}">
-                <a16:creationId xmlns:a16="http://schemas.microsoft.com/office/drawing/2014/main" id="{F9C22BF0-6CD1-E0BF-6C11-522BD64765F1}"/>
+                <a16:creationId xmlns:a16="http://schemas.microsoft.com/office/drawing/2014/main" id="{C3442721-A867-1FEB-B43B-5FB6F58A25CE}"/>
               </a:ext>
             </a:extLst>
           </p:cNvPr>
@@ -32390,7 +32332,7 @@
           <p:cNvPr id="3" name="Rectangle 2">
             <a:extLst>
               <a:ext uri="{FF2B5EF4-FFF2-40B4-BE49-F238E27FC236}">
-                <a16:creationId xmlns:a16="http://schemas.microsoft.com/office/drawing/2014/main" id="{76083C82-1931-4D14-F898-68AA1D05C1D1}"/>
+                <a16:creationId xmlns:a16="http://schemas.microsoft.com/office/drawing/2014/main" id="{3EB9219B-148C-C2E0-59A7-26767E4AE66A}"/>
               </a:ext>
             </a:extLst>
           </p:cNvPr>
@@ -32518,7 +32460,7 @@
           <p:cNvPr id="2" name="Rectangle 1">
             <a:extLst>
               <a:ext uri="{FF2B5EF4-FFF2-40B4-BE49-F238E27FC236}">
-                <a16:creationId xmlns:a16="http://schemas.microsoft.com/office/drawing/2014/main" id="{0ECCAFB0-A81B-6F48-FCBC-E657FC782DBB}"/>
+                <a16:creationId xmlns:a16="http://schemas.microsoft.com/office/drawing/2014/main" id="{68D8FFD1-B0E3-5041-EF2C-63BC235A4859}"/>
               </a:ext>
             </a:extLst>
           </p:cNvPr>
@@ -32527,8 +32469,8 @@
         </p:nvSpPr>
         <p:spPr>
           <a:xfrm>
-            <a:off x="885112" y="3194066"/>
-            <a:ext cx="7270146" cy="611256"/>
+            <a:off x="885112" y="3194065"/>
+            <a:ext cx="7270146" cy="1358425"/>
           </a:xfrm>
           <a:prstGeom prst="rect">
             <a:avLst/>
@@ -32560,32 +32502,32 @@
               </a:lnSpc>
             </a:pPr>
             <a:r>
-              <a:rPr lang="fr-FR" sz="1000" b="0" i="1" dirty="0">
+              <a:rPr lang="fr-FR" sz="1000" i="1" dirty="0">
                 <a:solidFill>
                   <a:schemeClr val="bg1"/>
                 </a:solidFill>
-                <a:effectLst/>
                 <a:latin typeface="+mj-lt"/>
               </a:rPr>
-              <a:t>cd /</a:t>
-            </a:r>
-            <a:r>
-              <a:rPr lang="fr-FR" sz="1000" b="0" i="1" dirty="0" err="1">
+              <a:t># pour l’utiliser directement dans le container </a:t>
+            </a:r>
+            <a:r>
+              <a:rPr lang="fr-FR" sz="1000" i="1" dirty="0" err="1">
                 <a:solidFill>
                   <a:schemeClr val="bg1"/>
                 </a:solidFill>
-                <a:effectLst/>
                 <a:latin typeface="+mj-lt"/>
               </a:rPr>
-              <a:t>tmp</a:t>
-            </a:r>
-            <a:endParaRPr lang="fr-FR" sz="1000" b="0" i="1" dirty="0">
-              <a:solidFill>
-                <a:schemeClr val="bg1"/>
-              </a:solidFill>
-              <a:effectLst/>
-              <a:latin typeface="+mj-lt"/>
-            </a:endParaRPr>
+              <a:t>spark</a:t>
+            </a:r>
+            <a:r>
+              <a:rPr lang="fr-FR" sz="1000" i="1" dirty="0">
+                <a:solidFill>
+                  <a:schemeClr val="bg1"/>
+                </a:solidFill>
+                <a:latin typeface="+mj-lt"/>
+              </a:rPr>
+              <a:t>-master</a:t>
+            </a:r>
           </a:p>
           <a:p>
             <a:pPr>
@@ -32600,27 +32542,70 @@
                 </a:solidFill>
                 <a:latin typeface="+mj-lt"/>
               </a:rPr>
-              <a:t>c</a:t>
-            </a:r>
-            <a:r>
-              <a:rPr lang="fr-FR" sz="1000" b="0" i="1" dirty="0" err="1">
+              <a:t>cp</a:t>
+            </a:r>
+            <a:r>
+              <a:rPr lang="fr-FR" sz="1000" i="1" dirty="0">
                 <a:solidFill>
                   <a:schemeClr val="bg1"/>
                 </a:solidFill>
-                <a:effectLst/>
                 <a:latin typeface="+mj-lt"/>
               </a:rPr>
-              <a:t>p</a:t>
-            </a:r>
-            <a:r>
-              <a:rPr lang="fr-FR" sz="1000" b="0" i="1" dirty="0">
+              <a:t> –R /data/</a:t>
+            </a:r>
+            <a:r>
+              <a:rPr lang="fr-FR" sz="1000" i="1" dirty="0" err="1">
                 <a:solidFill>
                   <a:schemeClr val="bg1"/>
                 </a:solidFill>
-                <a:effectLst/>
                 <a:latin typeface="+mj-lt"/>
               </a:rPr>
-              <a:t> /data/*.*</a:t>
+              <a:t>modeles</a:t>
+            </a:r>
+            <a:r>
+              <a:rPr lang="fr-FR" sz="1000" i="1" dirty="0">
+                <a:solidFill>
+                  <a:schemeClr val="bg1"/>
+                </a:solidFill>
+                <a:latin typeface="+mj-lt"/>
+              </a:rPr>
+              <a:t>/</a:t>
+            </a:r>
+            <a:r>
+              <a:rPr lang="fr-FR" sz="1000" i="1" dirty="0" err="1">
+                <a:solidFill>
+                  <a:schemeClr val="bg1"/>
+                </a:solidFill>
+                <a:latin typeface="+mj-lt"/>
+              </a:rPr>
+              <a:t>modelesRegression</a:t>
+            </a:r>
+            <a:r>
+              <a:rPr lang="fr-FR" sz="1000" i="1" dirty="0">
+                <a:solidFill>
+                  <a:schemeClr val="bg1"/>
+                </a:solidFill>
+                <a:latin typeface="+mj-lt"/>
+              </a:rPr>
+              <a:t> /</a:t>
+            </a:r>
+            <a:r>
+              <a:rPr lang="fr-FR" sz="1000" i="1" dirty="0" err="1">
+                <a:solidFill>
+                  <a:schemeClr val="bg1"/>
+                </a:solidFill>
+                <a:latin typeface="+mj-lt"/>
+              </a:rPr>
+              <a:t>tmp</a:t>
+            </a:r>
+            <a:r>
+              <a:rPr lang="fr-FR" sz="1000" i="1" dirty="0">
+                <a:solidFill>
+                  <a:schemeClr val="bg1"/>
+                </a:solidFill>
+                <a:latin typeface="+mj-lt"/>
+              </a:rPr>
+              <a:t>/</a:t>
             </a:r>
           </a:p>
           <a:p>
@@ -32630,43 +32615,92 @@
               </a:lnSpc>
             </a:pPr>
             <a:r>
+              <a:rPr lang="fr-FR" sz="1000" i="1" dirty="0" err="1">
+                <a:solidFill>
+                  <a:schemeClr val="bg1"/>
+                </a:solidFill>
+                <a:latin typeface="+mj-lt"/>
+              </a:rPr>
+              <a:t>cp</a:t>
+            </a:r>
+            <a:r>
               <a:rPr lang="fr-FR" sz="1000" i="1" dirty="0">
                 <a:solidFill>
                   <a:schemeClr val="bg1"/>
                 </a:solidFill>
                 <a:latin typeface="+mj-lt"/>
               </a:rPr>
-              <a:t>t</a:t>
-            </a:r>
-            <a:r>
-              <a:rPr lang="fr-FR" sz="1000" b="0" i="1" dirty="0">
+              <a:t> /data/prediction_chat_chien.py /</a:t>
+            </a:r>
+            <a:r>
+              <a:rPr lang="fr-FR" sz="1000" i="1" dirty="0" err="1">
                 <a:solidFill>
                   <a:schemeClr val="bg1"/>
                 </a:solidFill>
-                <a:effectLst/>
                 <a:latin typeface="+mj-lt"/>
               </a:rPr>
-              <a:t>ar </a:t>
-            </a:r>
-            <a:r>
-              <a:rPr lang="fr-FR" sz="1000" b="0" i="1" dirty="0" err="1">
+              <a:t>tmp</a:t>
+            </a:r>
+            <a:r>
+              <a:rPr lang="fr-FR" sz="1000" i="1" dirty="0">
                 <a:solidFill>
                   <a:schemeClr val="bg1"/>
                 </a:solidFill>
-                <a:effectLst/>
                 <a:latin typeface="+mj-lt"/>
               </a:rPr>
-              <a:t>xvf</a:t>
-            </a:r>
-            <a:r>
-              <a:rPr lang="fr-FR" sz="1000" b="0" i="1" dirty="0">
+              <a:t>/</a:t>
+            </a:r>
+          </a:p>
+          <a:p>
+            <a:pPr>
+              <a:lnSpc>
+                <a:spcPts val="1425"/>
+              </a:lnSpc>
+            </a:pPr>
+            <a:r>
+              <a:rPr lang="en-US" sz="1000" b="0" i="1" dirty="0">
                 <a:solidFill>
                   <a:schemeClr val="bg1"/>
                 </a:solidFill>
                 <a:effectLst/>
                 <a:latin typeface="+mj-lt"/>
               </a:rPr>
-              <a:t> monmodel.tar  </a:t>
+              <a:t>cp /data/images/cat/Birman_163_jpg.rf.de852821da3d65ebd26216dcfb51dd99.jpg /</a:t>
+            </a:r>
+            <a:r>
+              <a:rPr lang="en-US" sz="1000" b="0" i="1" dirty="0" err="1">
+                <a:solidFill>
+                  <a:schemeClr val="bg1"/>
+                </a:solidFill>
+                <a:effectLst/>
+                <a:latin typeface="+mj-lt"/>
+              </a:rPr>
+              <a:t>tmp</a:t>
+            </a:r>
+            <a:r>
+              <a:rPr lang="en-US" sz="1000" b="0" i="1" dirty="0">
+                <a:solidFill>
+                  <a:schemeClr val="bg1"/>
+                </a:solidFill>
+                <a:effectLst/>
+                <a:latin typeface="+mj-lt"/>
+              </a:rPr>
+              <a:t>/unchat.jpg</a:t>
+            </a:r>
+          </a:p>
+          <a:p>
+            <a:pPr>
+              <a:lnSpc>
+                <a:spcPts val="1425"/>
+              </a:lnSpc>
+            </a:pPr>
+            <a:r>
+              <a:rPr lang="fr-FR" sz="1000" i="1" dirty="0">
+                <a:solidFill>
+                  <a:schemeClr val="bg1"/>
+                </a:solidFill>
+              </a:rPr>
+              <a:t># pour l’utiliser à partir de la machine principale.</a:t>
             </a:r>
             <a:endParaRPr lang="en-US" sz="1000" b="0" i="1" dirty="0">
               <a:solidFill>
@@ -32676,12 +32710,96 @@
               <a:latin typeface="+mj-lt"/>
             </a:endParaRPr>
           </a:p>
+          <a:p>
+            <a:pPr>
+              <a:lnSpc>
+                <a:spcPts val="1425"/>
+              </a:lnSpc>
+            </a:pPr>
+            <a:r>
+              <a:rPr lang="fr-FR" sz="1000" i="1" dirty="0" err="1">
+                <a:solidFill>
+                  <a:schemeClr val="bg1"/>
+                </a:solidFill>
+              </a:rPr>
+              <a:t>cp</a:t>
+            </a:r>
+            <a:r>
+              <a:rPr lang="fr-FR" sz="1000" i="1" dirty="0">
+                <a:solidFill>
+                  <a:schemeClr val="bg1"/>
+                </a:solidFill>
+              </a:rPr>
+              <a:t> –R /data/</a:t>
+            </a:r>
+            <a:r>
+              <a:rPr lang="fr-FR" sz="1000" i="1" dirty="0" err="1">
+                <a:solidFill>
+                  <a:schemeClr val="bg1"/>
+                </a:solidFill>
+              </a:rPr>
+              <a:t>modeles</a:t>
+            </a:r>
+            <a:r>
+              <a:rPr lang="fr-FR" sz="1000" i="1" dirty="0">
+                <a:solidFill>
+                  <a:schemeClr val="bg1"/>
+                </a:solidFill>
+              </a:rPr>
+              <a:t>/</a:t>
+            </a:r>
+            <a:r>
+              <a:rPr lang="fr-FR" sz="1000" i="1" dirty="0" err="1">
+                <a:solidFill>
+                  <a:schemeClr val="bg1"/>
+                </a:solidFill>
+              </a:rPr>
+              <a:t>modelesRegression</a:t>
+            </a:r>
+            <a:r>
+              <a:rPr lang="fr-FR" sz="1000" i="1" dirty="0">
+                <a:solidFill>
+                  <a:schemeClr val="bg1"/>
+                </a:solidFill>
+              </a:rPr>
+              <a:t> /data/</a:t>
+            </a:r>
+          </a:p>
+          <a:p>
+            <a:pPr>
+              <a:lnSpc>
+                <a:spcPts val="1425"/>
+              </a:lnSpc>
+            </a:pPr>
+            <a:r>
+              <a:rPr lang="en-US" sz="1000" i="1" dirty="0">
+                <a:solidFill>
+                  <a:schemeClr val="bg1"/>
+                </a:solidFill>
+              </a:rPr>
+              <a:t>cp /data/images/cat/Birman_163_jpg.rf.de852821da3d65ebd26216dcfb51dd99.jpg /data/unchat.jpg</a:t>
+            </a:r>
+          </a:p>
+          <a:p>
+            <a:pPr>
+              <a:lnSpc>
+                <a:spcPts val="1425"/>
+              </a:lnSpc>
+            </a:pPr>
+            <a:endParaRPr lang="en-US" sz="1000" b="0" i="1" dirty="0">
+              <a:solidFill>
+                <a:schemeClr val="bg1"/>
+              </a:solidFill>
+              <a:effectLst/>
+              <a:latin typeface="+mj-lt"/>
+            </a:endParaRPr>
+          </a:p>
         </p:txBody>
       </p:sp>
     </p:spTree>
     <p:extLst>
       <p:ext uri="{BB962C8B-B14F-4D97-AF65-F5344CB8AC3E}">
-        <p14:creationId xmlns:p14="http://schemas.microsoft.com/office/powerpoint/2010/main" val="3966493580"/>
+        <p14:creationId xmlns:p14="http://schemas.microsoft.com/office/powerpoint/2010/main" val="938449513"/>
       </p:ext>
     </p:extLst>
   </p:cSld>
@@ -32729,7 +32847,7 @@
         <p:spPr>
           <a:xfrm>
             <a:off x="365918" y="1041315"/>
-            <a:ext cx="8146180" cy="4011355"/>
+            <a:ext cx="8146180" cy="3836948"/>
           </a:xfrm>
           <a:prstGeom prst="rect">
             <a:avLst/>
@@ -32751,7 +32869,7 @@
               </a:spcAft>
             </a:pPr>
             <a:r>
-              <a:rPr lang="fr-FR" sz="1200" dirty="0">
+              <a:rPr lang="fr-FR" sz="1000" dirty="0">
                 <a:ea typeface="Calibri" panose="020F0502020204030204" pitchFamily="34" charset="0"/>
                 <a:cs typeface="Arial" panose="020B0604020202020204" pitchFamily="34" charset="0"/>
               </a:rPr>
@@ -32768,21 +32886,21 @@
               </a:spcAft>
             </a:pPr>
             <a:r>
-              <a:rPr lang="fr-FR" sz="1200" dirty="0">
+              <a:rPr lang="fr-FR" sz="1000" dirty="0">
                 <a:ea typeface="Calibri" panose="020F0502020204030204" pitchFamily="34" charset="0"/>
                 <a:cs typeface="Arial" panose="020B0604020202020204" pitchFamily="34" charset="0"/>
               </a:rPr>
               <a:t>Installation de l’environnement pour l’utilisateur </a:t>
             </a:r>
             <a:r>
-              <a:rPr lang="fr-FR" sz="1200" dirty="0" err="1">
+              <a:rPr lang="fr-FR" sz="1000" dirty="0" err="1">
                 <a:ea typeface="Calibri" panose="020F0502020204030204" pitchFamily="34" charset="0"/>
                 <a:cs typeface="Arial" panose="020B0604020202020204" pitchFamily="34" charset="0"/>
               </a:rPr>
               <a:t>spark</a:t>
             </a:r>
             <a:r>
-              <a:rPr lang="fr-FR" sz="1200" dirty="0">
+              <a:rPr lang="fr-FR" sz="1000" dirty="0">
                 <a:ea typeface="Calibri" panose="020F0502020204030204" pitchFamily="34" charset="0"/>
                 <a:cs typeface="Arial" panose="020B0604020202020204" pitchFamily="34" charset="0"/>
               </a:rPr>
@@ -32798,7 +32916,7 @@
                 <a:spcPts val="400"/>
               </a:spcAft>
             </a:pPr>
-            <a:endParaRPr lang="fr-FR" sz="1200" dirty="0">
+            <a:endParaRPr lang="fr-FR" sz="1000" dirty="0">
               <a:ea typeface="Calibri" panose="020F0502020204030204" pitchFamily="34" charset="0"/>
               <a:cs typeface="Arial" panose="020B0604020202020204" pitchFamily="34" charset="0"/>
             </a:endParaRPr>
@@ -32812,7 +32930,7 @@
                 <a:spcPts val="400"/>
               </a:spcAft>
             </a:pPr>
-            <a:endParaRPr lang="fr-FR" sz="1200" dirty="0">
+            <a:endParaRPr lang="fr-FR" sz="1000" dirty="0">
               <a:ea typeface="Calibri" panose="020F0502020204030204" pitchFamily="34" charset="0"/>
               <a:cs typeface="Arial" panose="020B0604020202020204" pitchFamily="34" charset="0"/>
             </a:endParaRPr>
@@ -32826,7 +32944,7 @@
                 <a:spcPts val="400"/>
               </a:spcAft>
             </a:pPr>
-            <a:endParaRPr lang="fr-FR" sz="1200" dirty="0">
+            <a:endParaRPr lang="fr-FR" sz="1000" dirty="0">
               <a:ea typeface="Calibri" panose="020F0502020204030204" pitchFamily="34" charset="0"/>
               <a:cs typeface="Arial" panose="020B0604020202020204" pitchFamily="34" charset="0"/>
             </a:endParaRPr>
@@ -32840,7 +32958,7 @@
                 <a:spcPts val="400"/>
               </a:spcAft>
             </a:pPr>
-            <a:endParaRPr lang="fr-FR" sz="1200" dirty="0">
+            <a:endParaRPr lang="fr-FR" sz="1000" dirty="0">
               <a:ea typeface="Calibri" panose="020F0502020204030204" pitchFamily="34" charset="0"/>
               <a:cs typeface="Arial" panose="020B0604020202020204" pitchFamily="34" charset="0"/>
             </a:endParaRPr>
@@ -32854,7 +32972,7 @@
                 <a:spcPts val="400"/>
               </a:spcAft>
             </a:pPr>
-            <a:endParaRPr lang="fr-FR" sz="1200" dirty="0">
+            <a:endParaRPr lang="fr-FR" sz="1000" dirty="0">
               <a:ea typeface="Calibri" panose="020F0502020204030204" pitchFamily="34" charset="0"/>
               <a:cs typeface="Arial" panose="020B0604020202020204" pitchFamily="34" charset="0"/>
             </a:endParaRPr>
@@ -32868,7 +32986,7 @@
                 <a:spcPts val="400"/>
               </a:spcAft>
             </a:pPr>
-            <a:endParaRPr lang="fr-FR" sz="1200" dirty="0">
+            <a:endParaRPr lang="fr-FR" sz="1000" dirty="0">
               <a:ea typeface="Calibri" panose="020F0502020204030204" pitchFamily="34" charset="0"/>
               <a:cs typeface="Arial" panose="020B0604020202020204" pitchFamily="34" charset="0"/>
             </a:endParaRPr>
@@ -32882,7 +33000,7 @@
                 <a:spcPts val="400"/>
               </a:spcAft>
             </a:pPr>
-            <a:endParaRPr lang="fr-FR" sz="1200" dirty="0">
+            <a:endParaRPr lang="fr-FR" sz="1000" dirty="0">
               <a:ea typeface="Calibri" panose="020F0502020204030204" pitchFamily="34" charset="0"/>
               <a:cs typeface="Arial" panose="020B0604020202020204" pitchFamily="34" charset="0"/>
             </a:endParaRPr>
@@ -32896,13 +33014,10 @@
                 <a:spcPts val="400"/>
               </a:spcAft>
             </a:pPr>
-            <a:r>
-              <a:rPr lang="fr-FR" sz="1200" dirty="0">
-                <a:ea typeface="Calibri" panose="020F0502020204030204" pitchFamily="34" charset="0"/>
-                <a:cs typeface="Arial" panose="020B0604020202020204" pitchFamily="34" charset="0"/>
-              </a:rPr>
-              <a:t>Tester l’image: </a:t>
-            </a:r>
+            <a:endParaRPr lang="fr-FR" sz="1000" dirty="0">
+              <a:ea typeface="Calibri" panose="020F0502020204030204" pitchFamily="34" charset="0"/>
+              <a:cs typeface="Arial" panose="020B0604020202020204" pitchFamily="34" charset="0"/>
+            </a:endParaRPr>
           </a:p>
           <a:p>
             <a:pPr algn="just">
@@ -32913,10 +33028,13 @@
                 <a:spcPts val="400"/>
               </a:spcAft>
             </a:pPr>
-            <a:endParaRPr lang="fr-FR" sz="1200" dirty="0">
-              <a:ea typeface="Calibri" panose="020F0502020204030204" pitchFamily="34" charset="0"/>
-              <a:cs typeface="Arial" panose="020B0604020202020204" pitchFamily="34" charset="0"/>
-            </a:endParaRPr>
+            <a:r>
+              <a:rPr lang="fr-FR" sz="1000" dirty="0">
+                <a:ea typeface="Calibri" panose="020F0502020204030204" pitchFamily="34" charset="0"/>
+                <a:cs typeface="Arial" panose="020B0604020202020204" pitchFamily="34" charset="0"/>
+              </a:rPr>
+              <a:t>Tester l’image: </a:t>
+            </a:r>
           </a:p>
           <a:p>
             <a:pPr algn="just">
@@ -32927,7 +33045,7 @@
                 <a:spcPts val="400"/>
               </a:spcAft>
             </a:pPr>
-            <a:endParaRPr lang="fr-FR" sz="1200" dirty="0">
+            <a:endParaRPr lang="fr-FR" sz="1000" dirty="0">
               <a:ea typeface="Calibri" panose="020F0502020204030204" pitchFamily="34" charset="0"/>
               <a:cs typeface="Arial" panose="020B0604020202020204" pitchFamily="34" charset="0"/>
             </a:endParaRPr>
@@ -32941,13 +33059,10 @@
                 <a:spcPts val="400"/>
               </a:spcAft>
             </a:pPr>
-            <a:r>
-              <a:rPr lang="fr-FR" sz="1200" dirty="0">
-                <a:ea typeface="Calibri" panose="020F0502020204030204" pitchFamily="34" charset="0"/>
-                <a:cs typeface="Arial" panose="020B0604020202020204" pitchFamily="34" charset="0"/>
-              </a:rPr>
-              <a:t>Bien pour tester mais pas fonctionnelle.</a:t>
-            </a:r>
+            <a:endParaRPr lang="fr-FR" sz="1000" dirty="0">
+              <a:ea typeface="Calibri" panose="020F0502020204030204" pitchFamily="34" charset="0"/>
+              <a:cs typeface="Arial" panose="020B0604020202020204" pitchFamily="34" charset="0"/>
+            </a:endParaRPr>
           </a:p>
           <a:p>
             <a:pPr algn="just">
@@ -32959,7 +33074,24 @@
               </a:spcAft>
             </a:pPr>
             <a:r>
-              <a:rPr lang="fr-FR" sz="1200" dirty="0">
+              <a:rPr lang="fr-FR" sz="1000" dirty="0">
+                <a:ea typeface="Calibri" panose="020F0502020204030204" pitchFamily="34" charset="0"/>
+                <a:cs typeface="Arial" panose="020B0604020202020204" pitchFamily="34" charset="0"/>
+              </a:rPr>
+              <a:t>Bien pour tester mais pas fonctionnelle.</a:t>
+            </a:r>
+          </a:p>
+          <a:p>
+            <a:pPr algn="just">
+              <a:spcBef>
+                <a:spcPts val="400"/>
+              </a:spcBef>
+              <a:spcAft>
+                <a:spcPts val="400"/>
+              </a:spcAft>
+            </a:pPr>
+            <a:r>
+              <a:rPr lang="fr-FR" sz="1000" dirty="0">
                 <a:ea typeface="Calibri" panose="020F0502020204030204" pitchFamily="34" charset="0"/>
                 <a:cs typeface="Arial" panose="020B0604020202020204" pitchFamily="34" charset="0"/>
               </a:rPr>
@@ -33199,8 +33331,8 @@
           </a:p>
         </p:txBody>
       </p:sp>
-      <mc:AlternateContent xmlns:mc="http://schemas.openxmlformats.org/markup-compatibility/2006">
-        <mc:Choice xmlns:p14="http://schemas.microsoft.com/office/powerpoint/2010/main" Requires="p14">
+      <mc:AlternateContent xmlns:mc="http://schemas.openxmlformats.org/markup-compatibility/2006" xmlns:p14="http://schemas.microsoft.com/office/powerpoint/2010/main">
+        <mc:Choice Requires="p14">
           <p:contentPart p14:bwMode="auto" r:id="rId2">
             <p14:nvContentPartPr>
               <p14:cNvPr id="5" name="Encre 4">
@@ -33219,7 +33351,7 @@
             </p14:xfrm>
           </p:contentPart>
         </mc:Choice>
-        <mc:Fallback>
+        <mc:Fallback xmlns="">
           <p:pic>
             <p:nvPicPr>
               <p:cNvPr id="5" name="Encre 4">
@@ -33304,8 +33436,8 @@
         </p:nvSpPr>
         <p:spPr>
           <a:xfrm>
-            <a:off x="855043" y="1565491"/>
-            <a:ext cx="7270146" cy="1958061"/>
+            <a:off x="1372086" y="1503255"/>
+            <a:ext cx="7270146" cy="2211794"/>
           </a:xfrm>
           <a:prstGeom prst="rect">
             <a:avLst/>
@@ -33368,6 +33500,85 @@
               </a:lnSpc>
             </a:pPr>
             <a:r>
+              <a:rPr lang="fr-FR" sz="1000" i="1" dirty="0">
+                <a:solidFill>
+                  <a:schemeClr val="bg1"/>
+                </a:solidFill>
+              </a:rPr>
+              <a:t># </a:t>
+            </a:r>
+            <a:r>
+              <a:rPr lang="fr-FR" sz="1000" i="1" dirty="0" err="1">
+                <a:solidFill>
+                  <a:schemeClr val="bg1"/>
+                </a:solidFill>
+              </a:rPr>
+              <a:t>sudo</a:t>
+            </a:r>
+            <a:r>
+              <a:rPr lang="fr-FR" sz="1000" i="1" dirty="0">
+                <a:solidFill>
+                  <a:schemeClr val="bg1"/>
+                </a:solidFill>
+              </a:rPr>
+              <a:t> </a:t>
+            </a:r>
+            <a:r>
+              <a:rPr lang="fr-FR" sz="1000" i="1" dirty="0" err="1">
+                <a:solidFill>
+                  <a:schemeClr val="bg1"/>
+                </a:solidFill>
+              </a:rPr>
+              <a:t>apt</a:t>
+            </a:r>
+            <a:r>
+              <a:rPr lang="fr-FR" sz="1000" i="1" dirty="0">
+                <a:solidFill>
+                  <a:schemeClr val="bg1"/>
+                </a:solidFill>
+              </a:rPr>
+              <a:t> </a:t>
+            </a:r>
+            <a:r>
+              <a:rPr lang="fr-FR" sz="1000" i="1" dirty="0" err="1">
+                <a:solidFill>
+                  <a:schemeClr val="bg1"/>
+                </a:solidFill>
+              </a:rPr>
+              <a:t>install</a:t>
+            </a:r>
+            <a:r>
+              <a:rPr lang="fr-FR" sz="1000" i="1" dirty="0">
+                <a:solidFill>
+                  <a:schemeClr val="bg1"/>
+                </a:solidFill>
+              </a:rPr>
+              <a:t> python3-pip – déjà dans le </a:t>
+            </a:r>
+            <a:r>
+              <a:rPr lang="fr-FR" sz="1000" i="1" dirty="0" err="1">
+                <a:solidFill>
+                  <a:schemeClr val="bg1"/>
+                </a:solidFill>
+              </a:rPr>
+              <a:t>spark</a:t>
+            </a:r>
+            <a:r>
+              <a:rPr lang="fr-FR" sz="1000" i="1" dirty="0">
+                <a:solidFill>
+                  <a:schemeClr val="bg1"/>
+                </a:solidFill>
+              </a:rPr>
+              <a:t>-master </a:t>
+            </a:r>
+          </a:p>
+          <a:p>
+            <a:pPr>
+              <a:lnSpc>
+                <a:spcPts val="1425"/>
+              </a:lnSpc>
+            </a:pPr>
+            <a:r>
               <a:rPr lang="fr-FR" sz="1000" i="1" dirty="0" err="1">
                 <a:solidFill>
                   <a:schemeClr val="bg1"/>
@@ -33742,65 +33953,6 @@
               </a:solidFill>
               <a:latin typeface="+mj-lt"/>
             </a:endParaRPr>
-          </a:p>
-          <a:p>
-            <a:pPr>
-              <a:lnSpc>
-                <a:spcPts val="1425"/>
-              </a:lnSpc>
-            </a:pPr>
-            <a:r>
-              <a:rPr lang="fr-FR" sz="1000" i="1" dirty="0" err="1">
-                <a:solidFill>
-                  <a:schemeClr val="bg1"/>
-                </a:solidFill>
-                <a:latin typeface="+mj-lt"/>
-              </a:rPr>
-              <a:t>cp</a:t>
-            </a:r>
-            <a:r>
-              <a:rPr lang="fr-FR" sz="1000" i="1" dirty="0">
-                <a:solidFill>
-                  <a:schemeClr val="bg1"/>
-                </a:solidFill>
-                <a:latin typeface="+mj-lt"/>
-              </a:rPr>
-              <a:t> /data/*.* .</a:t>
-            </a:r>
-          </a:p>
-          <a:p>
-            <a:pPr>
-              <a:lnSpc>
-                <a:spcPts val="1425"/>
-              </a:lnSpc>
-            </a:pPr>
-            <a:r>
-              <a:rPr lang="fr-FR" sz="1000" i="1" dirty="0">
-                <a:solidFill>
-                  <a:schemeClr val="bg1"/>
-                </a:solidFill>
-                <a:latin typeface="+mj-lt"/>
-              </a:rPr>
-              <a:t>tar </a:t>
-            </a:r>
-            <a:r>
-              <a:rPr lang="fr-FR" sz="1000" i="1" dirty="0" err="1">
-                <a:solidFill>
-                  <a:schemeClr val="bg1"/>
-                </a:solidFill>
-                <a:latin typeface="+mj-lt"/>
-              </a:rPr>
-              <a:t>xvf</a:t>
-            </a:r>
-            <a:r>
-              <a:rPr lang="fr-FR" sz="1000" i="1" dirty="0">
-                <a:solidFill>
-                  <a:schemeClr val="bg1"/>
-                </a:solidFill>
-                <a:latin typeface="+mj-lt"/>
-              </a:rPr>
-              <a:t> monmodele.tar</a:t>
-            </a:r>
           </a:p>
           <a:p>
             <a:pPr>
@@ -34577,8 +34729,8 @@
           </a:p>
         </p:txBody>
       </p:sp>
-      <mc:AlternateContent xmlns:mc="http://schemas.openxmlformats.org/markup-compatibility/2006">
-        <mc:Choice xmlns:p14="http://schemas.microsoft.com/office/powerpoint/2010/main" Requires="p14">
+      <mc:AlternateContent xmlns:mc="http://schemas.openxmlformats.org/markup-compatibility/2006" xmlns:p14="http://schemas.microsoft.com/office/powerpoint/2010/main">
+        <mc:Choice Requires="p14">
           <p:contentPart p14:bwMode="auto" r:id="rId2">
             <p14:nvContentPartPr>
               <p14:cNvPr id="5" name="Encre 4">
@@ -34597,7 +34749,7 @@
             </p14:xfrm>
           </p:contentPart>
         </mc:Choice>
-        <mc:Fallback>
+        <mc:Fallback xmlns="">
           <p:pic>
             <p:nvPicPr>
               <p:cNvPr id="5" name="Encre 4">
@@ -36579,10 +36731,10 @@
       </p:sp>
       <p:pic>
         <p:nvPicPr>
-          <p:cNvPr id="7" name="Image 6">
+          <p:cNvPr id="4" name="Image 3">
             <a:extLst>
               <a:ext uri="{FF2B5EF4-FFF2-40B4-BE49-F238E27FC236}">
-                <a16:creationId xmlns:a16="http://schemas.microsoft.com/office/drawing/2014/main" id="{C66B85C1-86E9-36D0-F4CA-C2B31C5C90B1}"/>
+                <a16:creationId xmlns:a16="http://schemas.microsoft.com/office/drawing/2014/main" id="{EEFC947F-8CD9-8848-CB42-53CB9093A395}"/>
               </a:ext>
             </a:extLst>
           </p:cNvPr>
@@ -36599,8 +36751,8 @@
         </p:blipFill>
         <p:spPr>
           <a:xfrm>
-            <a:off x="1625600" y="2135600"/>
-            <a:ext cx="6140450" cy="2513193"/>
+            <a:off x="1208091" y="2073838"/>
+            <a:ext cx="6557959" cy="2811014"/>
           </a:xfrm>
           <a:prstGeom prst="rect">
             <a:avLst/>
@@ -40654,7 +40806,7 @@
                 <a:effectLst/>
                 <a:latin typeface="Consolas" panose="020B0609020204030204" pitchFamily="49" charset="0"/>
               </a:rPr>
-              <a:t>"./data/images/*/*"</a:t>
+              <a:t>"/data/images/*/*"</a:t>
             </a:r>
             <a:r>
               <a:rPr lang="fr-FR" sz="1000" b="0" dirty="0">
@@ -44273,15 +44425,6 @@
 </file>
 
 <file path=customXml/item1.xml><?xml version="1.0" encoding="utf-8"?>
-<?mso-contentType ?>
-<FormTemplates xmlns="http://schemas.microsoft.com/sharepoint/v3/contenttype/forms">
-  <Display>DocumentLibraryForm</Display>
-  <Edit>DocumentLibraryForm</Edit>
-  <New>DocumentLibraryForm</New>
-</FormTemplates>
-</file>
-
-<file path=customXml/item2.xml><?xml version="1.0" encoding="utf-8"?>
 <ct:contentTypeSchema xmlns:ct="http://schemas.microsoft.com/office/2006/metadata/contentType" xmlns:ma="http://schemas.microsoft.com/office/2006/metadata/properties/metaAttributes" ct:_="" ma:_="" ma:contentTypeName="Document" ma:contentTypeID="0x01010058419B1710D3DF4A9DAA9ADF73C802B5" ma:contentTypeVersion="14" ma:contentTypeDescription="Crée un document." ma:contentTypeScope="" ma:versionID="d45f398bd182fafaec1e6b20d8a38b6f">
   <xsd:schema xmlns:xsd="http://www.w3.org/2001/XMLSchema" xmlns:xs="http://www.w3.org/2001/XMLSchema" xmlns:p="http://schemas.microsoft.com/office/2006/metadata/properties" xmlns:ns3="6f1b3788-58c0-46a5-9604-64d97c7fc47c" xmlns:ns4="73eca01c-4ea5-40c8-83fd-b296bd340025" targetNamespace="http://schemas.microsoft.com/office/2006/metadata/properties" ma:root="true" ma:fieldsID="de746a5257d740f042749d495693305b" ns3:_="" ns4:_="">
     <xsd:import namespace="6f1b3788-58c0-46a5-9604-64d97c7fc47c"/>
@@ -44506,6 +44649,15 @@
 </ct:contentTypeSchema>
 </file>
 
+<file path=customXml/item2.xml><?xml version="1.0" encoding="utf-8"?>
+<?mso-contentType ?>
+<FormTemplates xmlns="http://schemas.microsoft.com/sharepoint/v3/contenttype/forms">
+  <Display>DocumentLibraryForm</Display>
+  <Edit>DocumentLibraryForm</Edit>
+  <New>DocumentLibraryForm</New>
+</FormTemplates>
+</file>
+
 <file path=customXml/item3.xml><?xml version="1.0" encoding="utf-8"?>
 <p:properties xmlns:p="http://schemas.microsoft.com/office/2006/metadata/properties" xmlns:xsi="http://www.w3.org/2001/XMLSchema-instance" xmlns:pc="http://schemas.microsoft.com/office/infopath/2007/PartnerControls">
   <documentManagement>
@@ -44522,14 +44674,6 @@
 </file>
 
 <file path=customXml/itemProps1.xml><?xml version="1.0" encoding="utf-8"?>
-<ds:datastoreItem xmlns:ds="http://schemas.openxmlformats.org/officeDocument/2006/customXml" ds:itemID="{EBAA46D8-DF31-4768-AD82-8F485C82E644}">
-  <ds:schemaRefs>
-    <ds:schemaRef ds:uri="http://schemas.microsoft.com/sharepoint/v3/contenttype/forms"/>
-  </ds:schemaRefs>
-</ds:datastoreItem>
-</file>
-
-<file path=customXml/itemProps2.xml><?xml version="1.0" encoding="utf-8"?>
 <ds:datastoreItem xmlns:ds="http://schemas.openxmlformats.org/officeDocument/2006/customXml" ds:itemID="{13D40C7A-64C6-4B3B-A1B6-9CB64BC75662}">
   <ds:schemaRefs>
     <ds:schemaRef ds:uri="http://schemas.microsoft.com/office/2006/metadata/contentType"/>
@@ -44544,6 +44688,14 @@
     <ds:schemaRef ds:uri="http://purl.org/dc/elements/1.1/"/>
     <ds:schemaRef ds:uri="http://purl.org/dc/terms/"/>
     <ds:schemaRef ds:uri="http://schemas.microsoft.com/internal/obd"/>
+  </ds:schemaRefs>
+</ds:datastoreItem>
+</file>
+
+<file path=customXml/itemProps2.xml><?xml version="1.0" encoding="utf-8"?>
+<ds:datastoreItem xmlns:ds="http://schemas.openxmlformats.org/officeDocument/2006/customXml" ds:itemID="{EBAA46D8-DF31-4768-AD82-8F485C82E644}">
+  <ds:schemaRefs>
+    <ds:schemaRef ds:uri="http://schemas.microsoft.com/sharepoint/v3/contenttype/forms"/>
   </ds:schemaRefs>
 </ds:datastoreItem>
 </file>
